--- a/public/lessons/year-6-maths/spring/week-11/reason-about-fraction-size/teaching-powerpoint-v1.pptx
+++ b/public/lessons/year-6-maths/spring/week-11/reason-about-fraction-size/teaching-powerpoint-v1.pptx
@@ -2,24 +2,24 @@
 <file path=ppt/presentation.xml><?xml version="1.0" encoding="utf-8"?>
 <p:presentation xmlns:p="http://schemas.openxmlformats.org/presentationml/2006/main">
   <p:sldMasterIdLst>
-    <p:sldMasterId xmlns:r="http://schemas.openxmlformats.org/officeDocument/2006/relationships" id="2147483648" r:id="R15562fd1116743b2"/>
+    <p:sldMasterId xmlns:r="http://schemas.openxmlformats.org/officeDocument/2006/relationships" id="2147483648" r:id="Rf007812f3ecd461b"/>
   </p:sldMasterIdLst>
   <p:notesMasterIdLst>
-    <p:notesMasterId xmlns:r="http://schemas.openxmlformats.org/officeDocument/2006/relationships" r:id="R810607cb02784558"/>
+    <p:notesMasterId xmlns:r="http://schemas.openxmlformats.org/officeDocument/2006/relationships" r:id="R0cf12e99d7b747e5"/>
   </p:notesMasterIdLst>
   <p:sldIdLst>
-    <p:sldId xmlns:r="http://schemas.openxmlformats.org/officeDocument/2006/relationships" id="256" r:id="R626f7feb06964266"/>
-    <p:sldId xmlns:r="http://schemas.openxmlformats.org/officeDocument/2006/relationships" id="257" r:id="R1f006adb82784ee0"/>
-    <p:sldId xmlns:r="http://schemas.openxmlformats.org/officeDocument/2006/relationships" id="258" r:id="R166116eb20584179"/>
-    <p:sldId xmlns:r="http://schemas.openxmlformats.org/officeDocument/2006/relationships" id="259" r:id="R2ad3222bc1d44b8f"/>
-    <p:sldId xmlns:r="http://schemas.openxmlformats.org/officeDocument/2006/relationships" id="260" r:id="Rbbd956f6bba646f2"/>
-    <p:sldId xmlns:r="http://schemas.openxmlformats.org/officeDocument/2006/relationships" id="261" r:id="R40d19f70f38f45bf"/>
-    <p:sldId xmlns:r="http://schemas.openxmlformats.org/officeDocument/2006/relationships" id="262" r:id="R2f076e09ed37401e"/>
-    <p:sldId xmlns:r="http://schemas.openxmlformats.org/officeDocument/2006/relationships" id="263" r:id="Raaeef45e7b7e43bd"/>
-    <p:sldId xmlns:r="http://schemas.openxmlformats.org/officeDocument/2006/relationships" id="264" r:id="Rff42cac25fa54f7e"/>
-    <p:sldId xmlns:r="http://schemas.openxmlformats.org/officeDocument/2006/relationships" id="265" r:id="Rd57c5fe1bc7f413d"/>
-    <p:sldId xmlns:r="http://schemas.openxmlformats.org/officeDocument/2006/relationships" id="266" r:id="R6738b6d3964d4fc7"/>
-    <p:sldId xmlns:r="http://schemas.openxmlformats.org/officeDocument/2006/relationships" id="267" r:id="R1e8f6083a9804172"/>
+    <p:sldId xmlns:r="http://schemas.openxmlformats.org/officeDocument/2006/relationships" id="256" r:id="Re55cdde59a2e423f"/>
+    <p:sldId xmlns:r="http://schemas.openxmlformats.org/officeDocument/2006/relationships" id="257" r:id="R04b940c378f34b00"/>
+    <p:sldId xmlns:r="http://schemas.openxmlformats.org/officeDocument/2006/relationships" id="258" r:id="R063f9b3f716e4278"/>
+    <p:sldId xmlns:r="http://schemas.openxmlformats.org/officeDocument/2006/relationships" id="259" r:id="R0b5525ea3ced46d5"/>
+    <p:sldId xmlns:r="http://schemas.openxmlformats.org/officeDocument/2006/relationships" id="260" r:id="R8bbb98287b924cf2"/>
+    <p:sldId xmlns:r="http://schemas.openxmlformats.org/officeDocument/2006/relationships" id="261" r:id="Ra04786cc2c5840b2"/>
+    <p:sldId xmlns:r="http://schemas.openxmlformats.org/officeDocument/2006/relationships" id="262" r:id="R6ba4d084aabd475f"/>
+    <p:sldId xmlns:r="http://schemas.openxmlformats.org/officeDocument/2006/relationships" id="263" r:id="R1175752b796b4bce"/>
+    <p:sldId xmlns:r="http://schemas.openxmlformats.org/officeDocument/2006/relationships" id="264" r:id="Rbfda6318476843a8"/>
+    <p:sldId xmlns:r="http://schemas.openxmlformats.org/officeDocument/2006/relationships" id="265" r:id="Rc99cffe1a8344da5"/>
+    <p:sldId xmlns:r="http://schemas.openxmlformats.org/officeDocument/2006/relationships" id="266" r:id="R1c9222ab66954981"/>
+    <p:sldId xmlns:r="http://schemas.openxmlformats.org/officeDocument/2006/relationships" id="267" r:id="R8a378f73804a4ae4"/>
   </p:sldIdLst>
   <p:sldSz cx="12192000" cy="6858000"/>
   <p:notesSz cx="6858000" cy="9144000"/>
@@ -873,7 +873,7 @@
           <a:lstStyle xmlns:a="http://schemas.openxmlformats.org/drawingml/2006/main"/>
           <a:p xmlns:a="http://schemas.openxmlformats.org/drawingml/2006/main">
             <a:r>
-              <a:t>I do. Reveal the question, setup and each calculation stage one click at a time. Pupils watch before copying. Model answer: 5/8 is one possible answer.</a:t>
+              <a:t>I do. Reveal the question, then reveal each mathematical change one click at a time. Point to the numbers and operation that changed before moving to the next line. Final answer: 5/8 is one possible answer.</a:t>
             </a:r>
           </a:p>
         </p:txBody>
@@ -1291,7 +1291,7 @@
   </p:cSld>
   <p:clrMap bg1="lt1" tx1="dk1" bg2="lt2" tx2="dk2" accent1="accent1" accent2="accent2" accent3="accent3" accent4="accent4" accent5="accent5" accent6="accent6" hlink="hlink" folHlink="folHlink"/>
   <p:sldLayoutIdLst>
-    <p:sldLayoutId xmlns:r="http://schemas.openxmlformats.org/officeDocument/2006/relationships" id="2147483649" r:id="R571709a6e3dd4c31"/>
+    <p:sldLayoutId xmlns:r="http://schemas.openxmlformats.org/officeDocument/2006/relationships" id="2147483649" r:id="R352367bb7d0d4a28"/>
   </p:sldLayoutIdLst>
   <p:txStyles>
     <p:titleStyle>
@@ -1842,7 +1842,7 @@
           <p:cNvPr id="12" name="">
             <a:extLst xmlns:a="http://schemas.openxmlformats.org/drawingml/2006/main">
               <a:ext uri="{FF2B5EF4-FFF2-40B4-BE49-F238E27FC236}">
-                <a16:creationId xmlns:a16="http://schemas.microsoft.com/office/drawing/2014/main" id="{D88298AE-6DED-4EFF-B315-2579AA5E1642}"/>
+                <a16:creationId xmlns:a16="http://schemas.microsoft.com/office/drawing/2014/main" id="{C7550421-B901-4884-B60C-B2F9B86F19C7}"/>
               </a:ext>
             </a:extLst>
           </p:cNvPr>
@@ -1874,7 +1874,7 @@
           <p:cNvPr id="2" name="">
             <a:extLst xmlns:a="http://schemas.openxmlformats.org/drawingml/2006/main">
               <a:ext uri="{FF2B5EF4-FFF2-40B4-BE49-F238E27FC236}">
-                <a16:creationId xmlns:a16="http://schemas.microsoft.com/office/drawing/2014/main" id="{1F135027-8364-4E77-883D-E893E6BC64B2}"/>
+                <a16:creationId xmlns:a16="http://schemas.microsoft.com/office/drawing/2014/main" id="{37AB7066-D03A-4595-A98F-B6CF9ED61720}"/>
               </a:ext>
             </a:extLst>
           </p:cNvPr>
@@ -1931,7 +1931,7 @@
           <p:cNvPr id="3" name="">
             <a:extLst xmlns:a="http://schemas.openxmlformats.org/drawingml/2006/main">
               <a:ext uri="{FF2B5EF4-FFF2-40B4-BE49-F238E27FC236}">
-                <a16:creationId xmlns:a16="http://schemas.microsoft.com/office/drawing/2014/main" id="{E420A17B-679B-4D09-82CF-CC92D4CE29A4}"/>
+                <a16:creationId xmlns:a16="http://schemas.microsoft.com/office/drawing/2014/main" id="{3C69B647-72B2-40D2-8C7A-E94EEBC4EE70}"/>
               </a:ext>
             </a:extLst>
           </p:cNvPr>
@@ -1965,7 +1965,7 @@
           <p:cNvPr id="4" name="">
             <a:extLst xmlns:a="http://schemas.openxmlformats.org/drawingml/2006/main">
               <a:ext uri="{FF2B5EF4-FFF2-40B4-BE49-F238E27FC236}">
-                <a16:creationId xmlns:a16="http://schemas.microsoft.com/office/drawing/2014/main" id="{C20F3D87-5600-4BA4-B31F-6282452EE299}"/>
+                <a16:creationId xmlns:a16="http://schemas.microsoft.com/office/drawing/2014/main" id="{AD3B08D4-5EE5-4E69-AC6C-EA7CDFAFBDC2}"/>
               </a:ext>
             </a:extLst>
           </p:cNvPr>
@@ -2022,7 +2022,7 @@
           <p:cNvPr id="5" name="">
             <a:extLst xmlns:a="http://schemas.openxmlformats.org/drawingml/2006/main">
               <a:ext uri="{FF2B5EF4-FFF2-40B4-BE49-F238E27FC236}">
-                <a16:creationId xmlns:a16="http://schemas.microsoft.com/office/drawing/2014/main" id="{DBD7EE2B-CC2E-4399-AF89-F5128BED5FAD}"/>
+                <a16:creationId xmlns:a16="http://schemas.microsoft.com/office/drawing/2014/main" id="{56E9C54C-2C1E-4EA7-B501-592AEFFE80A3}"/>
               </a:ext>
             </a:extLst>
           </p:cNvPr>
@@ -2079,7 +2079,7 @@
           <p:cNvPr id="6" name="">
             <a:extLst xmlns:a="http://schemas.openxmlformats.org/drawingml/2006/main">
               <a:ext uri="{FF2B5EF4-FFF2-40B4-BE49-F238E27FC236}">
-                <a16:creationId xmlns:a16="http://schemas.microsoft.com/office/drawing/2014/main" id="{0CBA0B4F-140D-48E3-BA26-719CD98F685B}"/>
+                <a16:creationId xmlns:a16="http://schemas.microsoft.com/office/drawing/2014/main" id="{E29EBC84-5BBF-407E-9B99-F708E97A0753}"/>
               </a:ext>
             </a:extLst>
           </p:cNvPr>
@@ -2113,7 +2113,7 @@
           <p:cNvPr id="7" name="">
             <a:extLst xmlns:a="http://schemas.openxmlformats.org/drawingml/2006/main">
               <a:ext uri="{FF2B5EF4-FFF2-40B4-BE49-F238E27FC236}">
-                <a16:creationId xmlns:a16="http://schemas.microsoft.com/office/drawing/2014/main" id="{467AE3D5-A735-40A0-9C65-C689B9DFE76C}"/>
+                <a16:creationId xmlns:a16="http://schemas.microsoft.com/office/drawing/2014/main" id="{92120F5F-46D8-44DB-A0AD-378FC15A9B38}"/>
               </a:ext>
             </a:extLst>
           </p:cNvPr>
@@ -2170,7 +2170,7 @@
           <p:cNvPr id="8" name="">
             <a:extLst xmlns:a="http://schemas.openxmlformats.org/drawingml/2006/main">
               <a:ext uri="{FF2B5EF4-FFF2-40B4-BE49-F238E27FC236}">
-                <a16:creationId xmlns:a16="http://schemas.microsoft.com/office/drawing/2014/main" id="{92D4229B-80B4-4C93-A28B-D3ECDE9238A4}"/>
+                <a16:creationId xmlns:a16="http://schemas.microsoft.com/office/drawing/2014/main" id="{CD0D3462-66A2-43A9-8C2F-A1FD1865012E}"/>
               </a:ext>
             </a:extLst>
           </p:cNvPr>
@@ -2227,7 +2227,7 @@
           <p:cNvPr id="9" name="">
             <a:extLst xmlns:a="http://schemas.openxmlformats.org/drawingml/2006/main">
               <a:ext uri="{FF2B5EF4-FFF2-40B4-BE49-F238E27FC236}">
-                <a16:creationId xmlns:a16="http://schemas.microsoft.com/office/drawing/2014/main" id="{DE563887-E5D1-4465-B1BA-51ED6BAA1590}"/>
+                <a16:creationId xmlns:a16="http://schemas.microsoft.com/office/drawing/2014/main" id="{970240DA-354E-4992-953D-7F3FC855EF39}"/>
               </a:ext>
             </a:extLst>
           </p:cNvPr>
@@ -2284,7 +2284,7 @@
           <p:cNvPr id="10" name="">
             <a:extLst xmlns:a="http://schemas.openxmlformats.org/drawingml/2006/main">
               <a:ext uri="{FF2B5EF4-FFF2-40B4-BE49-F238E27FC236}">
-                <a16:creationId xmlns:a16="http://schemas.microsoft.com/office/drawing/2014/main" id="{BDFB0560-FA97-4C7E-9E15-A0D1913E0AE8}"/>
+                <a16:creationId xmlns:a16="http://schemas.microsoft.com/office/drawing/2014/main" id="{9EB1B3B7-4154-4C70-B1A0-212E779F9851}"/>
               </a:ext>
             </a:extLst>
           </p:cNvPr>
@@ -2341,7 +2341,7 @@
           <p:cNvPr id="11" name="">
             <a:extLst xmlns:a="http://schemas.openxmlformats.org/drawingml/2006/main">
               <a:ext uri="{FF2B5EF4-FFF2-40B4-BE49-F238E27FC236}">
-                <a16:creationId xmlns:a16="http://schemas.microsoft.com/office/drawing/2014/main" id="{28F1A58B-ABC6-451E-9F80-2F758D6EA968}"/>
+                <a16:creationId xmlns:a16="http://schemas.microsoft.com/office/drawing/2014/main" id="{A86D4639-49CF-4FEE-8864-C91E2C51831D}"/>
               </a:ext>
             </a:extLst>
           </p:cNvPr>
@@ -2396,7 +2396,7 @@
     </p:spTree>
     <p:extLst>
       <p:ext uri="{BB962C8B-B14F-4D97-AF65-F5344CB8AC3E}">
-        <p14:creationId xmlns:p14="http://schemas.microsoft.com/office/powerpoint/2010/main" val="59017933"/>
+        <p14:creationId xmlns:p14="http://schemas.microsoft.com/office/powerpoint/2010/main" val="774523722"/>
       </p:ext>
     </p:extLst>
   </p:cSld>
@@ -2427,7 +2427,7 @@
           <p:cNvPr id="14" name="">
             <a:extLst xmlns:a="http://schemas.openxmlformats.org/drawingml/2006/main">
               <a:ext uri="{FF2B5EF4-FFF2-40B4-BE49-F238E27FC236}">
-                <a16:creationId xmlns:a16="http://schemas.microsoft.com/office/drawing/2014/main" id="{AA0CD138-220C-4490-8B06-B3B4DE72F91E}"/>
+                <a16:creationId xmlns:a16="http://schemas.microsoft.com/office/drawing/2014/main" id="{A7213AF1-41B7-44D2-9CAA-9730323D9806}"/>
               </a:ext>
             </a:extLst>
           </p:cNvPr>
@@ -2459,7 +2459,7 @@
           <p:cNvPr id="2" name="">
             <a:extLst xmlns:a="http://schemas.openxmlformats.org/drawingml/2006/main">
               <a:ext uri="{FF2B5EF4-FFF2-40B4-BE49-F238E27FC236}">
-                <a16:creationId xmlns:a16="http://schemas.microsoft.com/office/drawing/2014/main" id="{497893BB-B203-4F08-81D7-1D00C7DA0BCD}"/>
+                <a16:creationId xmlns:a16="http://schemas.microsoft.com/office/drawing/2014/main" id="{A5B29A96-3ADA-466D-9AA6-B09DB5489B35}"/>
               </a:ext>
             </a:extLst>
           </p:cNvPr>
@@ -2516,7 +2516,7 @@
           <p:cNvPr id="3" name="">
             <a:extLst xmlns:a="http://schemas.openxmlformats.org/drawingml/2006/main">
               <a:ext uri="{FF2B5EF4-FFF2-40B4-BE49-F238E27FC236}">
-                <a16:creationId xmlns:a16="http://schemas.microsoft.com/office/drawing/2014/main" id="{1BA8AB4C-B055-4EBC-A496-E7A6DE1E8B9A}"/>
+                <a16:creationId xmlns:a16="http://schemas.microsoft.com/office/drawing/2014/main" id="{F55F1B23-8483-48E8-9383-17A983E9D487}"/>
               </a:ext>
             </a:extLst>
           </p:cNvPr>
@@ -2548,7 +2548,7 @@
           <p:cNvPr id="4" name="">
             <a:extLst xmlns:a="http://schemas.openxmlformats.org/drawingml/2006/main">
               <a:ext uri="{FF2B5EF4-FFF2-40B4-BE49-F238E27FC236}">
-                <a16:creationId xmlns:a16="http://schemas.microsoft.com/office/drawing/2014/main" id="{88AB7918-D75B-4614-870C-89F6B3C9B136}"/>
+                <a16:creationId xmlns:a16="http://schemas.microsoft.com/office/drawing/2014/main" id="{AB9DE468-FA33-459D-B424-4DFCAC4D64EF}"/>
               </a:ext>
             </a:extLst>
           </p:cNvPr>
@@ -2605,7 +2605,7 @@
           <p:cNvPr id="5" name="">
             <a:extLst xmlns:a="http://schemas.openxmlformats.org/drawingml/2006/main">
               <a:ext uri="{FF2B5EF4-FFF2-40B4-BE49-F238E27FC236}">
-                <a16:creationId xmlns:a16="http://schemas.microsoft.com/office/drawing/2014/main" id="{9F3CAABC-D729-409A-B07F-5C6D5552324B}"/>
+                <a16:creationId xmlns:a16="http://schemas.microsoft.com/office/drawing/2014/main" id="{48579EC5-B24B-4CF1-9054-4D98F5FE6EF5}"/>
               </a:ext>
             </a:extLst>
           </p:cNvPr>
@@ -2662,7 +2662,7 @@
           <p:cNvPr id="6" name="">
             <a:extLst xmlns:a="http://schemas.openxmlformats.org/drawingml/2006/main">
               <a:ext uri="{FF2B5EF4-FFF2-40B4-BE49-F238E27FC236}">
-                <a16:creationId xmlns:a16="http://schemas.microsoft.com/office/drawing/2014/main" id="{442F787F-FA2E-4C24-B1FF-05A20C13B0E8}"/>
+                <a16:creationId xmlns:a16="http://schemas.microsoft.com/office/drawing/2014/main" id="{ACC7BC07-0654-4B29-B019-3D3128BBA7A3}"/>
               </a:ext>
             </a:extLst>
           </p:cNvPr>
@@ -2719,7 +2719,7 @@
           <p:cNvPr id="7" name="">
             <a:extLst xmlns:a="http://schemas.openxmlformats.org/drawingml/2006/main">
               <a:ext uri="{FF2B5EF4-FFF2-40B4-BE49-F238E27FC236}">
-                <a16:creationId xmlns:a16="http://schemas.microsoft.com/office/drawing/2014/main" id="{6827F0C9-1B2E-4FF8-9568-9BC54E075638}"/>
+                <a16:creationId xmlns:a16="http://schemas.microsoft.com/office/drawing/2014/main" id="{F7C2AF38-129D-4F39-9EBD-429B34C5293C}"/>
               </a:ext>
             </a:extLst>
           </p:cNvPr>
@@ -2751,7 +2751,7 @@
           <p:cNvPr id="8" name="">
             <a:extLst xmlns:a="http://schemas.openxmlformats.org/drawingml/2006/main">
               <a:ext uri="{FF2B5EF4-FFF2-40B4-BE49-F238E27FC236}">
-                <a16:creationId xmlns:a16="http://schemas.microsoft.com/office/drawing/2014/main" id="{A4EEE595-6D75-4A48-8EC2-CAE3178AA25A}"/>
+                <a16:creationId xmlns:a16="http://schemas.microsoft.com/office/drawing/2014/main" id="{E2DD7BB8-CE79-4BDA-B043-A59BDBE5F4E0}"/>
               </a:ext>
             </a:extLst>
           </p:cNvPr>
@@ -2808,7 +2808,7 @@
           <p:cNvPr id="9" name="">
             <a:extLst xmlns:a="http://schemas.openxmlformats.org/drawingml/2006/main">
               <a:ext uri="{FF2B5EF4-FFF2-40B4-BE49-F238E27FC236}">
-                <a16:creationId xmlns:a16="http://schemas.microsoft.com/office/drawing/2014/main" id="{DB561295-119E-4692-B318-FBDFE2CDDDD3}"/>
+                <a16:creationId xmlns:a16="http://schemas.microsoft.com/office/drawing/2014/main" id="{82AF55AF-9B13-46B7-98A9-3484FACCF314}"/>
               </a:ext>
             </a:extLst>
           </p:cNvPr>
@@ -2865,7 +2865,7 @@
           <p:cNvPr id="10" name="">
             <a:extLst xmlns:a="http://schemas.openxmlformats.org/drawingml/2006/main">
               <a:ext uri="{FF2B5EF4-FFF2-40B4-BE49-F238E27FC236}">
-                <a16:creationId xmlns:a16="http://schemas.microsoft.com/office/drawing/2014/main" id="{5075CFA4-AA0B-41A2-B0DB-6E4F560255B8}"/>
+                <a16:creationId xmlns:a16="http://schemas.microsoft.com/office/drawing/2014/main" id="{4B0F9B66-9908-47D5-92FE-5C6EEB10D8E0}"/>
               </a:ext>
             </a:extLst>
           </p:cNvPr>
@@ -2922,7 +2922,7 @@
           <p:cNvPr id="11" name="">
             <a:extLst xmlns:a="http://schemas.openxmlformats.org/drawingml/2006/main">
               <a:ext uri="{FF2B5EF4-FFF2-40B4-BE49-F238E27FC236}">
-                <a16:creationId xmlns:a16="http://schemas.microsoft.com/office/drawing/2014/main" id="{68D55241-68D0-458D-A9BC-059509349D1D}"/>
+                <a16:creationId xmlns:a16="http://schemas.microsoft.com/office/drawing/2014/main" id="{87588EA3-B6AB-465A-9517-9716232FD5C1}"/>
               </a:ext>
             </a:extLst>
           </p:cNvPr>
@@ -2979,7 +2979,7 @@
           <p:cNvPr id="12" name="">
             <a:extLst xmlns:a="http://schemas.openxmlformats.org/drawingml/2006/main">
               <a:ext uri="{FF2B5EF4-FFF2-40B4-BE49-F238E27FC236}">
-                <a16:creationId xmlns:a16="http://schemas.microsoft.com/office/drawing/2014/main" id="{925E84EF-377D-468F-8F2C-B23F009CDC8A}"/>
+                <a16:creationId xmlns:a16="http://schemas.microsoft.com/office/drawing/2014/main" id="{6E59F428-E8C9-422E-8C26-D0472DFE0EEF}"/>
               </a:ext>
             </a:extLst>
           </p:cNvPr>
@@ -3036,7 +3036,7 @@
           <p:cNvPr id="13" name="">
             <a:extLst xmlns:a="http://schemas.openxmlformats.org/drawingml/2006/main">
               <a:ext uri="{FF2B5EF4-FFF2-40B4-BE49-F238E27FC236}">
-                <a16:creationId xmlns:a16="http://schemas.microsoft.com/office/drawing/2014/main" id="{E3369156-F80B-46EB-A789-0A242F4F7C97}"/>
+                <a16:creationId xmlns:a16="http://schemas.microsoft.com/office/drawing/2014/main" id="{34365528-EF78-4629-BDD1-48A3EEE283C0}"/>
               </a:ext>
             </a:extLst>
           </p:cNvPr>
@@ -3091,7 +3091,7 @@
     </p:spTree>
     <p:extLst>
       <p:ext uri="{BB962C8B-B14F-4D97-AF65-F5344CB8AC3E}">
-        <p14:creationId xmlns:p14="http://schemas.microsoft.com/office/powerpoint/2010/main" val="606297065"/>
+        <p14:creationId xmlns:p14="http://schemas.microsoft.com/office/powerpoint/2010/main" val="1475321198"/>
       </p:ext>
     </p:extLst>
   </p:cSld>
@@ -3292,7 +3292,7 @@
           <p:cNvPr id="19" name="">
             <a:extLst xmlns:a="http://schemas.openxmlformats.org/drawingml/2006/main">
               <a:ext uri="{FF2B5EF4-FFF2-40B4-BE49-F238E27FC236}">
-                <a16:creationId xmlns:a16="http://schemas.microsoft.com/office/drawing/2014/main" id="{66FAA3B4-E0BC-4ECB-B978-670676FB8509}"/>
+                <a16:creationId xmlns:a16="http://schemas.microsoft.com/office/drawing/2014/main" id="{7238BD78-6DFC-4F4A-9B1A-5DDA3E72BA72}"/>
               </a:ext>
             </a:extLst>
           </p:cNvPr>
@@ -3324,7 +3324,7 @@
           <p:cNvPr id="2" name="">
             <a:extLst xmlns:a="http://schemas.openxmlformats.org/drawingml/2006/main">
               <a:ext uri="{FF2B5EF4-FFF2-40B4-BE49-F238E27FC236}">
-                <a16:creationId xmlns:a16="http://schemas.microsoft.com/office/drawing/2014/main" id="{33D4C03D-8034-47CA-A834-E9DFD5A8C912}"/>
+                <a16:creationId xmlns:a16="http://schemas.microsoft.com/office/drawing/2014/main" id="{2761C40C-BB8D-4598-B999-83CE251C1E24}"/>
               </a:ext>
             </a:extLst>
           </p:cNvPr>
@@ -3381,7 +3381,7 @@
           <p:cNvPr id="3" name="">
             <a:extLst xmlns:a="http://schemas.openxmlformats.org/drawingml/2006/main">
               <a:ext uri="{FF2B5EF4-FFF2-40B4-BE49-F238E27FC236}">
-                <a16:creationId xmlns:a16="http://schemas.microsoft.com/office/drawing/2014/main" id="{A1DE5D57-8B1F-4B44-A33D-84B7E6CCBA15}"/>
+                <a16:creationId xmlns:a16="http://schemas.microsoft.com/office/drawing/2014/main" id="{AC66ED64-2EFF-451B-9D2E-25513C527E39}"/>
               </a:ext>
             </a:extLst>
           </p:cNvPr>
@@ -3413,7 +3413,7 @@
           <p:cNvPr id="4" name="">
             <a:extLst xmlns:a="http://schemas.openxmlformats.org/drawingml/2006/main">
               <a:ext uri="{FF2B5EF4-FFF2-40B4-BE49-F238E27FC236}">
-                <a16:creationId xmlns:a16="http://schemas.microsoft.com/office/drawing/2014/main" id="{60A55423-4EC3-44E7-9C3B-B670F0257472}"/>
+                <a16:creationId xmlns:a16="http://schemas.microsoft.com/office/drawing/2014/main" id="{923F5080-0D99-4469-8866-BCFCB755CDC9}"/>
               </a:ext>
             </a:extLst>
           </p:cNvPr>
@@ -3470,7 +3470,7 @@
           <p:cNvPr id="5" name="">
             <a:extLst xmlns:a="http://schemas.openxmlformats.org/drawingml/2006/main">
               <a:ext uri="{FF2B5EF4-FFF2-40B4-BE49-F238E27FC236}">
-                <a16:creationId xmlns:a16="http://schemas.microsoft.com/office/drawing/2014/main" id="{F0E161E2-D91C-4916-9C96-AEE8AABB5429}"/>
+                <a16:creationId xmlns:a16="http://schemas.microsoft.com/office/drawing/2014/main" id="{DFC36534-FF6D-4A0D-9B61-39922F3CADE8}"/>
               </a:ext>
             </a:extLst>
           </p:cNvPr>
@@ -3527,7 +3527,7 @@
           <p:cNvPr id="6" name="">
             <a:extLst xmlns:a="http://schemas.openxmlformats.org/drawingml/2006/main">
               <a:ext uri="{FF2B5EF4-FFF2-40B4-BE49-F238E27FC236}">
-                <a16:creationId xmlns:a16="http://schemas.microsoft.com/office/drawing/2014/main" id="{F501FC49-3FB7-4A67-9434-F70D20030D92}"/>
+                <a16:creationId xmlns:a16="http://schemas.microsoft.com/office/drawing/2014/main" id="{E30B7EBF-A25D-4566-941C-8163F5447B52}"/>
               </a:ext>
             </a:extLst>
           </p:cNvPr>
@@ -3584,7 +3584,7 @@
           <p:cNvPr id="7" name="">
             <a:extLst xmlns:a="http://schemas.openxmlformats.org/drawingml/2006/main">
               <a:ext uri="{FF2B5EF4-FFF2-40B4-BE49-F238E27FC236}">
-                <a16:creationId xmlns:a16="http://schemas.microsoft.com/office/drawing/2014/main" id="{F6772AE1-6225-4902-B4B1-DD03E2E2ABFD}"/>
+                <a16:creationId xmlns:a16="http://schemas.microsoft.com/office/drawing/2014/main" id="{566B1C76-EB3E-451C-96BC-9E9BCAAC0999}"/>
               </a:ext>
             </a:extLst>
           </p:cNvPr>
@@ -3616,7 +3616,7 @@
           <p:cNvPr id="8" name="">
             <a:extLst xmlns:a="http://schemas.openxmlformats.org/drawingml/2006/main">
               <a:ext uri="{FF2B5EF4-FFF2-40B4-BE49-F238E27FC236}">
-                <a16:creationId xmlns:a16="http://schemas.microsoft.com/office/drawing/2014/main" id="{7D0E14DD-6DE0-4F06-A2A0-0F69A34E000C}"/>
+                <a16:creationId xmlns:a16="http://schemas.microsoft.com/office/drawing/2014/main" id="{0083D27E-B992-4AEE-B172-8BF449AA7582}"/>
               </a:ext>
             </a:extLst>
           </p:cNvPr>
@@ -3673,7 +3673,7 @@
           <p:cNvPr id="9" name="">
             <a:extLst xmlns:a="http://schemas.openxmlformats.org/drawingml/2006/main">
               <a:ext uri="{FF2B5EF4-FFF2-40B4-BE49-F238E27FC236}">
-                <a16:creationId xmlns:a16="http://schemas.microsoft.com/office/drawing/2014/main" id="{D2C1A95C-4611-42EB-8227-4F67AD97BB72}"/>
+                <a16:creationId xmlns:a16="http://schemas.microsoft.com/office/drawing/2014/main" id="{49963E90-B129-4707-8495-11D599836C84}"/>
               </a:ext>
             </a:extLst>
           </p:cNvPr>
@@ -3730,7 +3730,7 @@
           <p:cNvPr id="10" name="">
             <a:extLst xmlns:a="http://schemas.openxmlformats.org/drawingml/2006/main">
               <a:ext uri="{FF2B5EF4-FFF2-40B4-BE49-F238E27FC236}">
-                <a16:creationId xmlns:a16="http://schemas.microsoft.com/office/drawing/2014/main" id="{6BA623F5-1934-476B-8C64-15DCA4D8A865}"/>
+                <a16:creationId xmlns:a16="http://schemas.microsoft.com/office/drawing/2014/main" id="{0C5DDA21-94FD-4CE2-AA32-5DBFF14801D8}"/>
               </a:ext>
             </a:extLst>
           </p:cNvPr>
@@ -3787,7 +3787,7 @@
           <p:cNvPr id="11" name="">
             <a:extLst xmlns:a="http://schemas.openxmlformats.org/drawingml/2006/main">
               <a:ext uri="{FF2B5EF4-FFF2-40B4-BE49-F238E27FC236}">
-                <a16:creationId xmlns:a16="http://schemas.microsoft.com/office/drawing/2014/main" id="{733ACDC4-DF4E-41E3-AB16-737956297199}"/>
+                <a16:creationId xmlns:a16="http://schemas.microsoft.com/office/drawing/2014/main" id="{6FF745BF-E46C-4145-8BF5-9537FD234590}"/>
               </a:ext>
             </a:extLst>
           </p:cNvPr>
@@ -3821,7 +3821,7 @@
           <p:cNvPr id="12" name="">
             <a:extLst xmlns:a="http://schemas.openxmlformats.org/drawingml/2006/main">
               <a:ext uri="{FF2B5EF4-FFF2-40B4-BE49-F238E27FC236}">
-                <a16:creationId xmlns:a16="http://schemas.microsoft.com/office/drawing/2014/main" id="{3D2FBE6F-8FC9-44E0-9874-5C7C409705EA}"/>
+                <a16:creationId xmlns:a16="http://schemas.microsoft.com/office/drawing/2014/main" id="{A86673CA-9EEE-484C-AECD-896A12AADA0E}"/>
               </a:ext>
             </a:extLst>
           </p:cNvPr>
@@ -3878,7 +3878,7 @@
           <p:cNvPr id="13" name="">
             <a:extLst xmlns:a="http://schemas.openxmlformats.org/drawingml/2006/main">
               <a:ext uri="{FF2B5EF4-FFF2-40B4-BE49-F238E27FC236}">
-                <a16:creationId xmlns:a16="http://schemas.microsoft.com/office/drawing/2014/main" id="{70EBC8C4-5F8A-442E-961F-6350D1FE66D5}"/>
+                <a16:creationId xmlns:a16="http://schemas.microsoft.com/office/drawing/2014/main" id="{D46BDB2E-3D66-4589-A9A2-3DB7246195BF}"/>
               </a:ext>
             </a:extLst>
           </p:cNvPr>
@@ -3935,7 +3935,7 @@
           <p:cNvPr id="14" name="">
             <a:extLst xmlns:a="http://schemas.openxmlformats.org/drawingml/2006/main">
               <a:ext uri="{FF2B5EF4-FFF2-40B4-BE49-F238E27FC236}">
-                <a16:creationId xmlns:a16="http://schemas.microsoft.com/office/drawing/2014/main" id="{012434D8-B598-42CB-B3FC-B51150063061}"/>
+                <a16:creationId xmlns:a16="http://schemas.microsoft.com/office/drawing/2014/main" id="{8DDD6518-B678-4C7F-96E3-77B87391A168}"/>
               </a:ext>
             </a:extLst>
           </p:cNvPr>
@@ -3992,7 +3992,7 @@
           <p:cNvPr id="15" name="">
             <a:extLst xmlns:a="http://schemas.openxmlformats.org/drawingml/2006/main">
               <a:ext uri="{FF2B5EF4-FFF2-40B4-BE49-F238E27FC236}">
-                <a16:creationId xmlns:a16="http://schemas.microsoft.com/office/drawing/2014/main" id="{3F352F44-4F10-4FF0-8A61-6D353960DB13}"/>
+                <a16:creationId xmlns:a16="http://schemas.microsoft.com/office/drawing/2014/main" id="{42899BB4-58FA-4FB6-84A3-94E14DDA7801}"/>
               </a:ext>
             </a:extLst>
           </p:cNvPr>
@@ -4026,7 +4026,7 @@
           <p:cNvPr id="16" name="">
             <a:extLst xmlns:a="http://schemas.openxmlformats.org/drawingml/2006/main">
               <a:ext uri="{FF2B5EF4-FFF2-40B4-BE49-F238E27FC236}">
-                <a16:creationId xmlns:a16="http://schemas.microsoft.com/office/drawing/2014/main" id="{199458E2-518C-4853-8493-6250CCBFF4E7}"/>
+                <a16:creationId xmlns:a16="http://schemas.microsoft.com/office/drawing/2014/main" id="{54747510-6E8D-48B2-8F06-483F6EFDDCE4}"/>
               </a:ext>
             </a:extLst>
           </p:cNvPr>
@@ -4083,7 +4083,7 @@
           <p:cNvPr id="17" name="">
             <a:extLst xmlns:a="http://schemas.openxmlformats.org/drawingml/2006/main">
               <a:ext uri="{FF2B5EF4-FFF2-40B4-BE49-F238E27FC236}">
-                <a16:creationId xmlns:a16="http://schemas.microsoft.com/office/drawing/2014/main" id="{1608E87F-4EB9-4CC2-8A1F-766AD5BF7F16}"/>
+                <a16:creationId xmlns:a16="http://schemas.microsoft.com/office/drawing/2014/main" id="{E22451C7-A6C2-4A3F-B4A0-2ED4F99F53B4}"/>
               </a:ext>
             </a:extLst>
           </p:cNvPr>
@@ -4140,7 +4140,7 @@
           <p:cNvPr id="18" name="">
             <a:extLst xmlns:a="http://schemas.openxmlformats.org/drawingml/2006/main">
               <a:ext uri="{FF2B5EF4-FFF2-40B4-BE49-F238E27FC236}">
-                <a16:creationId xmlns:a16="http://schemas.microsoft.com/office/drawing/2014/main" id="{90B4C01C-6EC0-48AC-A7F0-C437CFEFADFF}"/>
+                <a16:creationId xmlns:a16="http://schemas.microsoft.com/office/drawing/2014/main" id="{DDCE2FAA-FDD4-4419-B312-602396966EA7}"/>
               </a:ext>
             </a:extLst>
           </p:cNvPr>
@@ -4195,7 +4195,7 @@
     </p:spTree>
     <p:extLst>
       <p:ext uri="{BB962C8B-B14F-4D97-AF65-F5344CB8AC3E}">
-        <p14:creationId xmlns:p14="http://schemas.microsoft.com/office/powerpoint/2010/main" val="691836201"/>
+        <p14:creationId xmlns:p14="http://schemas.microsoft.com/office/powerpoint/2010/main" val="1840790289"/>
       </p:ext>
     </p:extLst>
   </p:cSld>
@@ -4350,7 +4350,7 @@
           <p:cNvPr id="23" name="">
             <a:extLst xmlns:a="http://schemas.openxmlformats.org/drawingml/2006/main">
               <a:ext uri="{FF2B5EF4-FFF2-40B4-BE49-F238E27FC236}">
-                <a16:creationId xmlns:a16="http://schemas.microsoft.com/office/drawing/2014/main" id="{90F64C2C-BFC4-475D-A3CF-2AA029807425}"/>
+                <a16:creationId xmlns:a16="http://schemas.microsoft.com/office/drawing/2014/main" id="{E92DB1EA-B005-4B14-96AD-FED45F1D944D}"/>
               </a:ext>
             </a:extLst>
           </p:cNvPr>
@@ -4382,7 +4382,7 @@
           <p:cNvPr id="2" name="">
             <a:extLst xmlns:a="http://schemas.openxmlformats.org/drawingml/2006/main">
               <a:ext uri="{FF2B5EF4-FFF2-40B4-BE49-F238E27FC236}">
-                <a16:creationId xmlns:a16="http://schemas.microsoft.com/office/drawing/2014/main" id="{8A941D2F-E20F-4664-BF1D-8D95BF911CB8}"/>
+                <a16:creationId xmlns:a16="http://schemas.microsoft.com/office/drawing/2014/main" id="{F76A9C61-4137-430B-90C3-AA78E2BE46B3}"/>
               </a:ext>
             </a:extLst>
           </p:cNvPr>
@@ -4439,7 +4439,7 @@
           <p:cNvPr id="3" name="">
             <a:extLst xmlns:a="http://schemas.openxmlformats.org/drawingml/2006/main">
               <a:ext uri="{FF2B5EF4-FFF2-40B4-BE49-F238E27FC236}">
-                <a16:creationId xmlns:a16="http://schemas.microsoft.com/office/drawing/2014/main" id="{2F167585-FF63-48CA-80D0-4FD5290A20D7}"/>
+                <a16:creationId xmlns:a16="http://schemas.microsoft.com/office/drawing/2014/main" id="{31A8EC74-7850-4F1C-93CF-3E7FF87DB0CC}"/>
               </a:ext>
             </a:extLst>
           </p:cNvPr>
@@ -4471,7 +4471,7 @@
           <p:cNvPr id="4" name="">
             <a:extLst xmlns:a="http://schemas.openxmlformats.org/drawingml/2006/main">
               <a:ext uri="{FF2B5EF4-FFF2-40B4-BE49-F238E27FC236}">
-                <a16:creationId xmlns:a16="http://schemas.microsoft.com/office/drawing/2014/main" id="{C01D96AC-F279-41A0-9A23-966B1054B117}"/>
+                <a16:creationId xmlns:a16="http://schemas.microsoft.com/office/drawing/2014/main" id="{98D6DD75-12FC-4E2E-95C3-B9C99A687628}"/>
               </a:ext>
             </a:extLst>
           </p:cNvPr>
@@ -4528,7 +4528,7 @@
           <p:cNvPr id="5" name="">
             <a:extLst xmlns:a="http://schemas.openxmlformats.org/drawingml/2006/main">
               <a:ext uri="{FF2B5EF4-FFF2-40B4-BE49-F238E27FC236}">
-                <a16:creationId xmlns:a16="http://schemas.microsoft.com/office/drawing/2014/main" id="{5127C204-F324-4DF4-9DCF-07E4E0B79B6F}"/>
+                <a16:creationId xmlns:a16="http://schemas.microsoft.com/office/drawing/2014/main" id="{DB8DBD0C-BAF3-4CC0-90A2-72AD6B628925}"/>
               </a:ext>
             </a:extLst>
           </p:cNvPr>
@@ -4585,7 +4585,7 @@
           <p:cNvPr id="6" name="">
             <a:extLst xmlns:a="http://schemas.openxmlformats.org/drawingml/2006/main">
               <a:ext uri="{FF2B5EF4-FFF2-40B4-BE49-F238E27FC236}">
-                <a16:creationId xmlns:a16="http://schemas.microsoft.com/office/drawing/2014/main" id="{5ECE01F6-76E7-4713-B011-C8B8A51A091B}"/>
+                <a16:creationId xmlns:a16="http://schemas.microsoft.com/office/drawing/2014/main" id="{A2903976-36E5-4B98-9C16-37A0537D35B7}"/>
               </a:ext>
             </a:extLst>
           </p:cNvPr>
@@ -4642,7 +4642,7 @@
           <p:cNvPr id="7" name="">
             <a:extLst xmlns:a="http://schemas.openxmlformats.org/drawingml/2006/main">
               <a:ext uri="{FF2B5EF4-FFF2-40B4-BE49-F238E27FC236}">
-                <a16:creationId xmlns:a16="http://schemas.microsoft.com/office/drawing/2014/main" id="{DC281113-D0B2-4203-9651-9BEC3E5CCAFD}"/>
+                <a16:creationId xmlns:a16="http://schemas.microsoft.com/office/drawing/2014/main" id="{5C45CEA3-9849-48A5-97CE-41695017CDF7}"/>
               </a:ext>
             </a:extLst>
           </p:cNvPr>
@@ -4674,7 +4674,7 @@
           <p:cNvPr id="8" name="">
             <a:extLst xmlns:a="http://schemas.openxmlformats.org/drawingml/2006/main">
               <a:ext uri="{FF2B5EF4-FFF2-40B4-BE49-F238E27FC236}">
-                <a16:creationId xmlns:a16="http://schemas.microsoft.com/office/drawing/2014/main" id="{254F5778-90E9-4FAE-BFFD-A8E17985DBF5}"/>
+                <a16:creationId xmlns:a16="http://schemas.microsoft.com/office/drawing/2014/main" id="{1E8C6983-801E-44B7-9E14-0B9E10737792}"/>
               </a:ext>
             </a:extLst>
           </p:cNvPr>
@@ -4731,7 +4731,7 @@
           <p:cNvPr id="9" name="">
             <a:extLst xmlns:a="http://schemas.openxmlformats.org/drawingml/2006/main">
               <a:ext uri="{FF2B5EF4-FFF2-40B4-BE49-F238E27FC236}">
-                <a16:creationId xmlns:a16="http://schemas.microsoft.com/office/drawing/2014/main" id="{87F9F9BE-9A02-4268-8A6C-65315CE19684}"/>
+                <a16:creationId xmlns:a16="http://schemas.microsoft.com/office/drawing/2014/main" id="{9B032B5C-CBD2-40C6-8DAC-24D95DEBEBAA}"/>
               </a:ext>
             </a:extLst>
           </p:cNvPr>
@@ -4788,7 +4788,7 @@
           <p:cNvPr id="10" name="">
             <a:extLst xmlns:a="http://schemas.openxmlformats.org/drawingml/2006/main">
               <a:ext uri="{FF2B5EF4-FFF2-40B4-BE49-F238E27FC236}">
-                <a16:creationId xmlns:a16="http://schemas.microsoft.com/office/drawing/2014/main" id="{C07896C6-9B6F-438E-9719-C8A22A6C23A7}"/>
+                <a16:creationId xmlns:a16="http://schemas.microsoft.com/office/drawing/2014/main" id="{4DC65114-9BB9-4235-9C29-A55CE7765D2C}"/>
               </a:ext>
             </a:extLst>
           </p:cNvPr>
@@ -4822,7 +4822,7 @@
           <p:cNvPr id="11" name="">
             <a:extLst xmlns:a="http://schemas.openxmlformats.org/drawingml/2006/main">
               <a:ext uri="{FF2B5EF4-FFF2-40B4-BE49-F238E27FC236}">
-                <a16:creationId xmlns:a16="http://schemas.microsoft.com/office/drawing/2014/main" id="{F423D5CC-A0AB-4E86-99E2-A03524CE6DFE}"/>
+                <a16:creationId xmlns:a16="http://schemas.microsoft.com/office/drawing/2014/main" id="{64DC36D3-D6C5-4F4E-993C-CA9992A5860A}"/>
               </a:ext>
             </a:extLst>
           </p:cNvPr>
@@ -4854,7 +4854,7 @@
           <p:cNvPr id="12" name="">
             <a:extLst xmlns:a="http://schemas.openxmlformats.org/drawingml/2006/main">
               <a:ext uri="{FF2B5EF4-FFF2-40B4-BE49-F238E27FC236}">
-                <a16:creationId xmlns:a16="http://schemas.microsoft.com/office/drawing/2014/main" id="{EEC08496-DC40-4289-8F7B-0970BC457BEA}"/>
+                <a16:creationId xmlns:a16="http://schemas.microsoft.com/office/drawing/2014/main" id="{7AFD7119-906B-45B3-BA18-DDDCFF15167E}"/>
               </a:ext>
             </a:extLst>
           </p:cNvPr>
@@ -4911,7 +4911,7 @@
           <p:cNvPr id="13" name="">
             <a:extLst xmlns:a="http://schemas.openxmlformats.org/drawingml/2006/main">
               <a:ext uri="{FF2B5EF4-FFF2-40B4-BE49-F238E27FC236}">
-                <a16:creationId xmlns:a16="http://schemas.microsoft.com/office/drawing/2014/main" id="{CB85A78C-E008-423B-AE26-987D4389A4B8}"/>
+                <a16:creationId xmlns:a16="http://schemas.microsoft.com/office/drawing/2014/main" id="{7825A5D3-5363-49A9-889E-9228F6B00F58}"/>
               </a:ext>
             </a:extLst>
           </p:cNvPr>
@@ -4968,7 +4968,7 @@
           <p:cNvPr id="14" name="">
             <a:extLst xmlns:a="http://schemas.openxmlformats.org/drawingml/2006/main">
               <a:ext uri="{FF2B5EF4-FFF2-40B4-BE49-F238E27FC236}">
-                <a16:creationId xmlns:a16="http://schemas.microsoft.com/office/drawing/2014/main" id="{0FBCC767-4801-46CD-891B-891A02FA2052}"/>
+                <a16:creationId xmlns:a16="http://schemas.microsoft.com/office/drawing/2014/main" id="{CA6E6C78-BBE0-4303-BB6F-E36BC40E385B}"/>
               </a:ext>
             </a:extLst>
           </p:cNvPr>
@@ -5002,7 +5002,7 @@
           <p:cNvPr id="15" name="">
             <a:extLst xmlns:a="http://schemas.openxmlformats.org/drawingml/2006/main">
               <a:ext uri="{FF2B5EF4-FFF2-40B4-BE49-F238E27FC236}">
-                <a16:creationId xmlns:a16="http://schemas.microsoft.com/office/drawing/2014/main" id="{617E0383-C76D-4ECC-B036-51B9A24AEC08}"/>
+                <a16:creationId xmlns:a16="http://schemas.microsoft.com/office/drawing/2014/main" id="{6E0B3B21-B35B-433A-B7F9-04E834EAFF54}"/>
               </a:ext>
             </a:extLst>
           </p:cNvPr>
@@ -5034,7 +5034,7 @@
           <p:cNvPr id="16" name="">
             <a:extLst xmlns:a="http://schemas.openxmlformats.org/drawingml/2006/main">
               <a:ext uri="{FF2B5EF4-FFF2-40B4-BE49-F238E27FC236}">
-                <a16:creationId xmlns:a16="http://schemas.microsoft.com/office/drawing/2014/main" id="{46886AAA-B076-4D7A-B3AB-160512F79BAF}"/>
+                <a16:creationId xmlns:a16="http://schemas.microsoft.com/office/drawing/2014/main" id="{7589A555-3CC6-4F2A-9B29-D81B1A194C00}"/>
               </a:ext>
             </a:extLst>
           </p:cNvPr>
@@ -5091,7 +5091,7 @@
           <p:cNvPr id="17" name="">
             <a:extLst xmlns:a="http://schemas.openxmlformats.org/drawingml/2006/main">
               <a:ext uri="{FF2B5EF4-FFF2-40B4-BE49-F238E27FC236}">
-                <a16:creationId xmlns:a16="http://schemas.microsoft.com/office/drawing/2014/main" id="{EBB70372-B241-4FF3-B70F-6252A6E80BDE}"/>
+                <a16:creationId xmlns:a16="http://schemas.microsoft.com/office/drawing/2014/main" id="{CE33A7B5-2C36-4887-8568-A1802951D540}"/>
               </a:ext>
             </a:extLst>
           </p:cNvPr>
@@ -5148,7 +5148,7 @@
           <p:cNvPr id="18" name="">
             <a:extLst xmlns:a="http://schemas.openxmlformats.org/drawingml/2006/main">
               <a:ext uri="{FF2B5EF4-FFF2-40B4-BE49-F238E27FC236}">
-                <a16:creationId xmlns:a16="http://schemas.microsoft.com/office/drawing/2014/main" id="{42B6856C-ADE6-42D8-B487-A1035F264984}"/>
+                <a16:creationId xmlns:a16="http://schemas.microsoft.com/office/drawing/2014/main" id="{5B95D0BE-1BD5-4841-AB06-105A03B8C725}"/>
               </a:ext>
             </a:extLst>
           </p:cNvPr>
@@ -5182,7 +5182,7 @@
           <p:cNvPr id="19" name="">
             <a:extLst xmlns:a="http://schemas.openxmlformats.org/drawingml/2006/main">
               <a:ext uri="{FF2B5EF4-FFF2-40B4-BE49-F238E27FC236}">
-                <a16:creationId xmlns:a16="http://schemas.microsoft.com/office/drawing/2014/main" id="{168B4BBB-9EB2-4F41-BF82-EDCBA980C44E}"/>
+                <a16:creationId xmlns:a16="http://schemas.microsoft.com/office/drawing/2014/main" id="{52CFEBE0-8B7B-4ECC-A7E8-53D84D763497}"/>
               </a:ext>
             </a:extLst>
           </p:cNvPr>
@@ -5214,7 +5214,7 @@
           <p:cNvPr id="20" name="">
             <a:extLst xmlns:a="http://schemas.openxmlformats.org/drawingml/2006/main">
               <a:ext uri="{FF2B5EF4-FFF2-40B4-BE49-F238E27FC236}">
-                <a16:creationId xmlns:a16="http://schemas.microsoft.com/office/drawing/2014/main" id="{659DBAAD-B0F8-4C72-8772-656CACE29D80}"/>
+                <a16:creationId xmlns:a16="http://schemas.microsoft.com/office/drawing/2014/main" id="{02D16A51-917C-4637-A27C-BDB75AAA7DC2}"/>
               </a:ext>
             </a:extLst>
           </p:cNvPr>
@@ -5271,7 +5271,7 @@
           <p:cNvPr id="21" name="">
             <a:extLst xmlns:a="http://schemas.openxmlformats.org/drawingml/2006/main">
               <a:ext uri="{FF2B5EF4-FFF2-40B4-BE49-F238E27FC236}">
-                <a16:creationId xmlns:a16="http://schemas.microsoft.com/office/drawing/2014/main" id="{453E3084-AA3B-45DA-95E4-A6919BA38609}"/>
+                <a16:creationId xmlns:a16="http://schemas.microsoft.com/office/drawing/2014/main" id="{7C60FFD6-B69E-498E-9330-DBF06FFC6367}"/>
               </a:ext>
             </a:extLst>
           </p:cNvPr>
@@ -5328,7 +5328,7 @@
           <p:cNvPr id="22" name="">
             <a:extLst xmlns:a="http://schemas.openxmlformats.org/drawingml/2006/main">
               <a:ext uri="{FF2B5EF4-FFF2-40B4-BE49-F238E27FC236}">
-                <a16:creationId xmlns:a16="http://schemas.microsoft.com/office/drawing/2014/main" id="{EE9EED92-1167-49B5-A275-C8B9715F82FE}"/>
+                <a16:creationId xmlns:a16="http://schemas.microsoft.com/office/drawing/2014/main" id="{87E6447D-7B99-4FD3-8EB8-3A9BC969F7BB}"/>
               </a:ext>
             </a:extLst>
           </p:cNvPr>
@@ -5383,7 +5383,7 @@
     </p:spTree>
     <p:extLst>
       <p:ext uri="{BB962C8B-B14F-4D97-AF65-F5344CB8AC3E}">
-        <p14:creationId xmlns:p14="http://schemas.microsoft.com/office/powerpoint/2010/main" val="1967833071"/>
+        <p14:creationId xmlns:p14="http://schemas.microsoft.com/office/powerpoint/2010/main" val="717119777"/>
       </p:ext>
     </p:extLst>
   </p:cSld>
@@ -5584,7 +5584,7 @@
           <p:cNvPr id="23" name="">
             <a:extLst xmlns:a="http://schemas.openxmlformats.org/drawingml/2006/main">
               <a:ext uri="{FF2B5EF4-FFF2-40B4-BE49-F238E27FC236}">
-                <a16:creationId xmlns:a16="http://schemas.microsoft.com/office/drawing/2014/main" id="{63038EAF-5C0F-476F-B239-CFCAA669EFC0}"/>
+                <a16:creationId xmlns:a16="http://schemas.microsoft.com/office/drawing/2014/main" id="{E8EF5755-91FC-4EC3-91B4-28EF756AAC85}"/>
               </a:ext>
             </a:extLst>
           </p:cNvPr>
@@ -5616,7 +5616,7 @@
           <p:cNvPr id="2" name="">
             <a:extLst xmlns:a="http://schemas.openxmlformats.org/drawingml/2006/main">
               <a:ext uri="{FF2B5EF4-FFF2-40B4-BE49-F238E27FC236}">
-                <a16:creationId xmlns:a16="http://schemas.microsoft.com/office/drawing/2014/main" id="{B788E2B5-35DB-4DEA-8B33-7664112F3BD0}"/>
+                <a16:creationId xmlns:a16="http://schemas.microsoft.com/office/drawing/2014/main" id="{4EFF666F-68F0-43C4-9CFC-831C68C26E45}"/>
               </a:ext>
             </a:extLst>
           </p:cNvPr>
@@ -5673,7 +5673,7 @@
           <p:cNvPr id="3" name="">
             <a:extLst xmlns:a="http://schemas.openxmlformats.org/drawingml/2006/main">
               <a:ext uri="{FF2B5EF4-FFF2-40B4-BE49-F238E27FC236}">
-                <a16:creationId xmlns:a16="http://schemas.microsoft.com/office/drawing/2014/main" id="{39DF921E-4D13-4A43-A28B-3184C34C46C2}"/>
+                <a16:creationId xmlns:a16="http://schemas.microsoft.com/office/drawing/2014/main" id="{DC8DB375-945F-448F-A3BA-04B291825FF5}"/>
               </a:ext>
             </a:extLst>
           </p:cNvPr>
@@ -5705,7 +5705,7 @@
           <p:cNvPr id="4" name="">
             <a:extLst xmlns:a="http://schemas.openxmlformats.org/drawingml/2006/main">
               <a:ext uri="{FF2B5EF4-FFF2-40B4-BE49-F238E27FC236}">
-                <a16:creationId xmlns:a16="http://schemas.microsoft.com/office/drawing/2014/main" id="{675A99C3-2A78-411C-9011-E15BDFB8A4B9}"/>
+                <a16:creationId xmlns:a16="http://schemas.microsoft.com/office/drawing/2014/main" id="{59BBC983-2861-4BD7-8774-310315706E03}"/>
               </a:ext>
             </a:extLst>
           </p:cNvPr>
@@ -5762,7 +5762,7 @@
           <p:cNvPr id="5" name="">
             <a:extLst xmlns:a="http://schemas.openxmlformats.org/drawingml/2006/main">
               <a:ext uri="{FF2B5EF4-FFF2-40B4-BE49-F238E27FC236}">
-                <a16:creationId xmlns:a16="http://schemas.microsoft.com/office/drawing/2014/main" id="{E2DBD698-2A23-4CB0-B713-0F657A9C8515}"/>
+                <a16:creationId xmlns:a16="http://schemas.microsoft.com/office/drawing/2014/main" id="{055DCF71-5B38-4885-AC78-541B43E6BC90}"/>
               </a:ext>
             </a:extLst>
           </p:cNvPr>
@@ -5819,7 +5819,7 @@
           <p:cNvPr id="6" name="">
             <a:extLst xmlns:a="http://schemas.openxmlformats.org/drawingml/2006/main">
               <a:ext uri="{FF2B5EF4-FFF2-40B4-BE49-F238E27FC236}">
-                <a16:creationId xmlns:a16="http://schemas.microsoft.com/office/drawing/2014/main" id="{273FB5F6-D355-44E9-AD02-D656D174C3B6}"/>
+                <a16:creationId xmlns:a16="http://schemas.microsoft.com/office/drawing/2014/main" id="{67D46A9E-D80C-4741-ABFA-9F6E2B7E6058}"/>
               </a:ext>
             </a:extLst>
           </p:cNvPr>
@@ -5876,7 +5876,7 @@
           <p:cNvPr id="7" name="">
             <a:extLst xmlns:a="http://schemas.openxmlformats.org/drawingml/2006/main">
               <a:ext uri="{FF2B5EF4-FFF2-40B4-BE49-F238E27FC236}">
-                <a16:creationId xmlns:a16="http://schemas.microsoft.com/office/drawing/2014/main" id="{5DBB983B-533E-4F56-98AF-8A39D1057771}"/>
+                <a16:creationId xmlns:a16="http://schemas.microsoft.com/office/drawing/2014/main" id="{72CCB6AA-FACD-4F00-A912-585DA1B569CC}"/>
               </a:ext>
             </a:extLst>
           </p:cNvPr>
@@ -5908,7 +5908,7 @@
           <p:cNvPr id="8" name="">
             <a:extLst xmlns:a="http://schemas.openxmlformats.org/drawingml/2006/main">
               <a:ext uri="{FF2B5EF4-FFF2-40B4-BE49-F238E27FC236}">
-                <a16:creationId xmlns:a16="http://schemas.microsoft.com/office/drawing/2014/main" id="{39626813-7CE4-43E3-A914-610DDF76441E}"/>
+                <a16:creationId xmlns:a16="http://schemas.microsoft.com/office/drawing/2014/main" id="{F906C990-B1C4-4551-8066-E908D6A11E06}"/>
               </a:ext>
             </a:extLst>
           </p:cNvPr>
@@ -5965,7 +5965,7 @@
           <p:cNvPr id="9" name="">
             <a:extLst xmlns:a="http://schemas.openxmlformats.org/drawingml/2006/main">
               <a:ext uri="{FF2B5EF4-FFF2-40B4-BE49-F238E27FC236}">
-                <a16:creationId xmlns:a16="http://schemas.microsoft.com/office/drawing/2014/main" id="{5F1386FA-0789-4C54-AD36-422B71A0100B}"/>
+                <a16:creationId xmlns:a16="http://schemas.microsoft.com/office/drawing/2014/main" id="{34CA103C-3C73-4CB3-B34E-7C163A01DDA8}"/>
               </a:ext>
             </a:extLst>
           </p:cNvPr>
@@ -6022,7 +6022,7 @@
           <p:cNvPr id="10" name="">
             <a:extLst xmlns:a="http://schemas.openxmlformats.org/drawingml/2006/main">
               <a:ext uri="{FF2B5EF4-FFF2-40B4-BE49-F238E27FC236}">
-                <a16:creationId xmlns:a16="http://schemas.microsoft.com/office/drawing/2014/main" id="{FA383E36-D1BE-4F4E-A01D-A99AEF6BA80D}"/>
+                <a16:creationId xmlns:a16="http://schemas.microsoft.com/office/drawing/2014/main" id="{19448AB9-56BC-44C9-9F38-96AAB310733F}"/>
               </a:ext>
             </a:extLst>
           </p:cNvPr>
@@ -6056,7 +6056,7 @@
           <p:cNvPr id="11" name="">
             <a:extLst xmlns:a="http://schemas.openxmlformats.org/drawingml/2006/main">
               <a:ext uri="{FF2B5EF4-FFF2-40B4-BE49-F238E27FC236}">
-                <a16:creationId xmlns:a16="http://schemas.microsoft.com/office/drawing/2014/main" id="{753DD546-ACE3-4FC3-B7B9-F768480B16AA}"/>
+                <a16:creationId xmlns:a16="http://schemas.microsoft.com/office/drawing/2014/main" id="{4F14B5F8-5438-40C5-AB07-3E63D39C33AF}"/>
               </a:ext>
             </a:extLst>
           </p:cNvPr>
@@ -6088,7 +6088,7 @@
           <p:cNvPr id="12" name="">
             <a:extLst xmlns:a="http://schemas.openxmlformats.org/drawingml/2006/main">
               <a:ext uri="{FF2B5EF4-FFF2-40B4-BE49-F238E27FC236}">
-                <a16:creationId xmlns:a16="http://schemas.microsoft.com/office/drawing/2014/main" id="{F517CFA3-D828-49F5-9C5B-1DB6BD202AE0}"/>
+                <a16:creationId xmlns:a16="http://schemas.microsoft.com/office/drawing/2014/main" id="{0322F798-940A-400C-803D-1419D411DC9C}"/>
               </a:ext>
             </a:extLst>
           </p:cNvPr>
@@ -6145,7 +6145,7 @@
           <p:cNvPr id="13" name="">
             <a:extLst xmlns:a="http://schemas.openxmlformats.org/drawingml/2006/main">
               <a:ext uri="{FF2B5EF4-FFF2-40B4-BE49-F238E27FC236}">
-                <a16:creationId xmlns:a16="http://schemas.microsoft.com/office/drawing/2014/main" id="{A17E4DE8-C16E-4728-971A-5E0C0FCA0834}"/>
+                <a16:creationId xmlns:a16="http://schemas.microsoft.com/office/drawing/2014/main" id="{053345CE-BE66-45AD-BA5E-6DF7EF3F2911}"/>
               </a:ext>
             </a:extLst>
           </p:cNvPr>
@@ -6202,7 +6202,7 @@
           <p:cNvPr id="14" name="">
             <a:extLst xmlns:a="http://schemas.openxmlformats.org/drawingml/2006/main">
               <a:ext uri="{FF2B5EF4-FFF2-40B4-BE49-F238E27FC236}">
-                <a16:creationId xmlns:a16="http://schemas.microsoft.com/office/drawing/2014/main" id="{D2F1C18E-082D-4287-AA68-02027077373D}"/>
+                <a16:creationId xmlns:a16="http://schemas.microsoft.com/office/drawing/2014/main" id="{A7D7FC9A-C3DD-4850-A700-958ECDCE397B}"/>
               </a:ext>
             </a:extLst>
           </p:cNvPr>
@@ -6236,7 +6236,7 @@
           <p:cNvPr id="15" name="">
             <a:extLst xmlns:a="http://schemas.openxmlformats.org/drawingml/2006/main">
               <a:ext uri="{FF2B5EF4-FFF2-40B4-BE49-F238E27FC236}">
-                <a16:creationId xmlns:a16="http://schemas.microsoft.com/office/drawing/2014/main" id="{9717B7B7-B099-4803-B16C-A9509C2BF6A1}"/>
+                <a16:creationId xmlns:a16="http://schemas.microsoft.com/office/drawing/2014/main" id="{BCCCC383-1D38-45DD-B0A5-FD93D54A8139}"/>
               </a:ext>
             </a:extLst>
           </p:cNvPr>
@@ -6268,7 +6268,7 @@
           <p:cNvPr id="16" name="">
             <a:extLst xmlns:a="http://schemas.openxmlformats.org/drawingml/2006/main">
               <a:ext uri="{FF2B5EF4-FFF2-40B4-BE49-F238E27FC236}">
-                <a16:creationId xmlns:a16="http://schemas.microsoft.com/office/drawing/2014/main" id="{4069A4EB-1053-48F5-9E17-2E1340EE3ECC}"/>
+                <a16:creationId xmlns:a16="http://schemas.microsoft.com/office/drawing/2014/main" id="{6E61C59D-250F-4F86-954D-62CBE9B166D5}"/>
               </a:ext>
             </a:extLst>
           </p:cNvPr>
@@ -6325,7 +6325,7 @@
           <p:cNvPr id="17" name="">
             <a:extLst xmlns:a="http://schemas.openxmlformats.org/drawingml/2006/main">
               <a:ext uri="{FF2B5EF4-FFF2-40B4-BE49-F238E27FC236}">
-                <a16:creationId xmlns:a16="http://schemas.microsoft.com/office/drawing/2014/main" id="{FE33EF7C-2E45-400F-A4B9-2B7718739114}"/>
+                <a16:creationId xmlns:a16="http://schemas.microsoft.com/office/drawing/2014/main" id="{623F4CF5-FB30-4502-A946-A5B02754C77C}"/>
               </a:ext>
             </a:extLst>
           </p:cNvPr>
@@ -6382,7 +6382,7 @@
           <p:cNvPr id="18" name="">
             <a:extLst xmlns:a="http://schemas.openxmlformats.org/drawingml/2006/main">
               <a:ext uri="{FF2B5EF4-FFF2-40B4-BE49-F238E27FC236}">
-                <a16:creationId xmlns:a16="http://schemas.microsoft.com/office/drawing/2014/main" id="{8716B4A6-D0C8-488D-AFDE-693D3E883D4C}"/>
+                <a16:creationId xmlns:a16="http://schemas.microsoft.com/office/drawing/2014/main" id="{7E6CC836-6311-49D5-A3DB-21D736F0C804}"/>
               </a:ext>
             </a:extLst>
           </p:cNvPr>
@@ -6416,7 +6416,7 @@
           <p:cNvPr id="19" name="">
             <a:extLst xmlns:a="http://schemas.openxmlformats.org/drawingml/2006/main">
               <a:ext uri="{FF2B5EF4-FFF2-40B4-BE49-F238E27FC236}">
-                <a16:creationId xmlns:a16="http://schemas.microsoft.com/office/drawing/2014/main" id="{A3D5B39A-F93E-47CE-B544-0C9AA2A7458B}"/>
+                <a16:creationId xmlns:a16="http://schemas.microsoft.com/office/drawing/2014/main" id="{AFDC2EF0-0D79-4377-AB00-3BF878F947D8}"/>
               </a:ext>
             </a:extLst>
           </p:cNvPr>
@@ -6448,7 +6448,7 @@
           <p:cNvPr id="20" name="">
             <a:extLst xmlns:a="http://schemas.openxmlformats.org/drawingml/2006/main">
               <a:ext uri="{FF2B5EF4-FFF2-40B4-BE49-F238E27FC236}">
-                <a16:creationId xmlns:a16="http://schemas.microsoft.com/office/drawing/2014/main" id="{E0741693-5405-4CFC-862A-F6D4CC5B1B4C}"/>
+                <a16:creationId xmlns:a16="http://schemas.microsoft.com/office/drawing/2014/main" id="{F749D224-CEE5-4E08-A33C-DD80F5D139A8}"/>
               </a:ext>
             </a:extLst>
           </p:cNvPr>
@@ -6505,7 +6505,7 @@
           <p:cNvPr id="21" name="">
             <a:extLst xmlns:a="http://schemas.openxmlformats.org/drawingml/2006/main">
               <a:ext uri="{FF2B5EF4-FFF2-40B4-BE49-F238E27FC236}">
-                <a16:creationId xmlns:a16="http://schemas.microsoft.com/office/drawing/2014/main" id="{0EC64C34-BD0E-43BE-8F8E-EEBD9FCFA076}"/>
+                <a16:creationId xmlns:a16="http://schemas.microsoft.com/office/drawing/2014/main" id="{42E35C78-EBE2-45EA-A84A-7B91D536FAD4}"/>
               </a:ext>
             </a:extLst>
           </p:cNvPr>
@@ -6562,7 +6562,7 @@
           <p:cNvPr id="22" name="">
             <a:extLst xmlns:a="http://schemas.openxmlformats.org/drawingml/2006/main">
               <a:ext uri="{FF2B5EF4-FFF2-40B4-BE49-F238E27FC236}">
-                <a16:creationId xmlns:a16="http://schemas.microsoft.com/office/drawing/2014/main" id="{A53CD5C2-B77D-4425-9799-46CCE4B3C5FA}"/>
+                <a16:creationId xmlns:a16="http://schemas.microsoft.com/office/drawing/2014/main" id="{FCF07D19-CC4A-4177-9C97-F5BC49D3C157}"/>
               </a:ext>
             </a:extLst>
           </p:cNvPr>
@@ -6617,7 +6617,7 @@
     </p:spTree>
     <p:extLst>
       <p:ext uri="{BB962C8B-B14F-4D97-AF65-F5344CB8AC3E}">
-        <p14:creationId xmlns:p14="http://schemas.microsoft.com/office/powerpoint/2010/main" val="1067421243"/>
+        <p14:creationId xmlns:p14="http://schemas.microsoft.com/office/powerpoint/2010/main" val="1218267972"/>
       </p:ext>
     </p:extLst>
   </p:cSld>
@@ -6818,7 +6818,7 @@
           <p:cNvPr id="16" name="">
             <a:extLst xmlns:a="http://schemas.openxmlformats.org/drawingml/2006/main">
               <a:ext uri="{FF2B5EF4-FFF2-40B4-BE49-F238E27FC236}">
-                <a16:creationId xmlns:a16="http://schemas.microsoft.com/office/drawing/2014/main" id="{A94399F1-9366-4B66-8690-37F336431E4F}"/>
+                <a16:creationId xmlns:a16="http://schemas.microsoft.com/office/drawing/2014/main" id="{31512F75-25D6-4ED3-9125-B726E297147F}"/>
               </a:ext>
             </a:extLst>
           </p:cNvPr>
@@ -6850,7 +6850,7 @@
           <p:cNvPr id="2" name="">
             <a:extLst xmlns:a="http://schemas.openxmlformats.org/drawingml/2006/main">
               <a:ext uri="{FF2B5EF4-FFF2-40B4-BE49-F238E27FC236}">
-                <a16:creationId xmlns:a16="http://schemas.microsoft.com/office/drawing/2014/main" id="{D8678073-B0D8-4724-B99D-227676555038}"/>
+                <a16:creationId xmlns:a16="http://schemas.microsoft.com/office/drawing/2014/main" id="{0407D411-8A1A-413A-BC3A-1EA3F128190A}"/>
               </a:ext>
             </a:extLst>
           </p:cNvPr>
@@ -6907,7 +6907,7 @@
           <p:cNvPr id="3" name="">
             <a:extLst xmlns:a="http://schemas.openxmlformats.org/drawingml/2006/main">
               <a:ext uri="{FF2B5EF4-FFF2-40B4-BE49-F238E27FC236}">
-                <a16:creationId xmlns:a16="http://schemas.microsoft.com/office/drawing/2014/main" id="{AD173AA5-BD9F-4A89-AF66-D0B5BF468690}"/>
+                <a16:creationId xmlns:a16="http://schemas.microsoft.com/office/drawing/2014/main" id="{20EA2849-30AB-405C-87A0-0CFA45F24B53}"/>
               </a:ext>
             </a:extLst>
           </p:cNvPr>
@@ -6939,7 +6939,7 @@
           <p:cNvPr id="4" name="">
             <a:extLst xmlns:a="http://schemas.openxmlformats.org/drawingml/2006/main">
               <a:ext uri="{FF2B5EF4-FFF2-40B4-BE49-F238E27FC236}">
-                <a16:creationId xmlns:a16="http://schemas.microsoft.com/office/drawing/2014/main" id="{9AA2E747-390B-49CE-8F53-9AABF7919FD9}"/>
+                <a16:creationId xmlns:a16="http://schemas.microsoft.com/office/drawing/2014/main" id="{3E8385BF-5D6D-4CD1-BF27-8A4CBC99E8F6}"/>
               </a:ext>
             </a:extLst>
           </p:cNvPr>
@@ -6996,7 +6996,7 @@
           <p:cNvPr id="5" name="">
             <a:extLst xmlns:a="http://schemas.openxmlformats.org/drawingml/2006/main">
               <a:ext uri="{FF2B5EF4-FFF2-40B4-BE49-F238E27FC236}">
-                <a16:creationId xmlns:a16="http://schemas.microsoft.com/office/drawing/2014/main" id="{4D2C70DF-6933-4E07-84E2-12C5226B3998}"/>
+                <a16:creationId xmlns:a16="http://schemas.microsoft.com/office/drawing/2014/main" id="{7139699B-C8B6-4568-9E68-A88CB9155ADC}"/>
               </a:ext>
             </a:extLst>
           </p:cNvPr>
@@ -7053,7 +7053,7 @@
           <p:cNvPr id="6" name="">
             <a:extLst xmlns:a="http://schemas.openxmlformats.org/drawingml/2006/main">
               <a:ext uri="{FF2B5EF4-FFF2-40B4-BE49-F238E27FC236}">
-                <a16:creationId xmlns:a16="http://schemas.microsoft.com/office/drawing/2014/main" id="{BC1FBAE2-12BC-4393-8385-2B561954BFE3}"/>
+                <a16:creationId xmlns:a16="http://schemas.microsoft.com/office/drawing/2014/main" id="{EDF94EC3-4193-4772-B0A3-35EF497357BC}"/>
               </a:ext>
             </a:extLst>
           </p:cNvPr>
@@ -7110,7 +7110,7 @@
           <p:cNvPr id="7" name="">
             <a:extLst xmlns:a="http://schemas.openxmlformats.org/drawingml/2006/main">
               <a:ext uri="{FF2B5EF4-FFF2-40B4-BE49-F238E27FC236}">
-                <a16:creationId xmlns:a16="http://schemas.microsoft.com/office/drawing/2014/main" id="{87FC117D-F5BB-4769-BC67-7EB9C29171FB}"/>
+                <a16:creationId xmlns:a16="http://schemas.microsoft.com/office/drawing/2014/main" id="{223F2195-4008-49B3-80CE-D2DA4C5F3234}"/>
               </a:ext>
             </a:extLst>
           </p:cNvPr>
@@ -7142,7 +7142,7 @@
           <p:cNvPr id="8" name="">
             <a:extLst xmlns:a="http://schemas.openxmlformats.org/drawingml/2006/main">
               <a:ext uri="{FF2B5EF4-FFF2-40B4-BE49-F238E27FC236}">
-                <a16:creationId xmlns:a16="http://schemas.microsoft.com/office/drawing/2014/main" id="{4F2607F1-5C15-4626-AB77-9BEE8F3E4669}"/>
+                <a16:creationId xmlns:a16="http://schemas.microsoft.com/office/drawing/2014/main" id="{0939F938-16DC-4810-8845-5C87B2DB62E3}"/>
               </a:ext>
             </a:extLst>
           </p:cNvPr>
@@ -7199,7 +7199,7 @@
           <p:cNvPr id="9" name="">
             <a:extLst xmlns:a="http://schemas.openxmlformats.org/drawingml/2006/main">
               <a:ext uri="{FF2B5EF4-FFF2-40B4-BE49-F238E27FC236}">
-                <a16:creationId xmlns:a16="http://schemas.microsoft.com/office/drawing/2014/main" id="{9439E293-C24F-46BF-BDBD-FA7812AE19DE}"/>
+                <a16:creationId xmlns:a16="http://schemas.microsoft.com/office/drawing/2014/main" id="{41EF0B98-64A7-4419-8A1F-581513D22018}"/>
               </a:ext>
             </a:extLst>
           </p:cNvPr>
@@ -7256,7 +7256,7 @@
           <p:cNvPr id="10" name="">
             <a:extLst xmlns:a="http://schemas.openxmlformats.org/drawingml/2006/main">
               <a:ext uri="{FF2B5EF4-FFF2-40B4-BE49-F238E27FC236}">
-                <a16:creationId xmlns:a16="http://schemas.microsoft.com/office/drawing/2014/main" id="{125BAD02-67A5-47CE-8134-B40DE60F75A3}"/>
+                <a16:creationId xmlns:a16="http://schemas.microsoft.com/office/drawing/2014/main" id="{1E1D7EC4-4283-4CFD-A8C1-B993BC7F9DD9}"/>
               </a:ext>
             </a:extLst>
           </p:cNvPr>
@@ -7313,7 +7313,7 @@
           <p:cNvPr id="11" name="">
             <a:extLst xmlns:a="http://schemas.openxmlformats.org/drawingml/2006/main">
               <a:ext uri="{FF2B5EF4-FFF2-40B4-BE49-F238E27FC236}">
-                <a16:creationId xmlns:a16="http://schemas.microsoft.com/office/drawing/2014/main" id="{8813F99D-58DA-46F8-A1C4-664130677E6C}"/>
+                <a16:creationId xmlns:a16="http://schemas.microsoft.com/office/drawing/2014/main" id="{DBEAEEA8-7D22-4D57-AB96-076AF97BE641}"/>
               </a:ext>
             </a:extLst>
           </p:cNvPr>
@@ -7345,7 +7345,7 @@
           <p:cNvPr id="12" name="">
             <a:extLst xmlns:a="http://schemas.openxmlformats.org/drawingml/2006/main">
               <a:ext uri="{FF2B5EF4-FFF2-40B4-BE49-F238E27FC236}">
-                <a16:creationId xmlns:a16="http://schemas.microsoft.com/office/drawing/2014/main" id="{16789C33-01D1-4B3C-8A66-2052BBB1AB17}"/>
+                <a16:creationId xmlns:a16="http://schemas.microsoft.com/office/drawing/2014/main" id="{0F2C76C1-922A-4AD8-968E-0A8D5A581C95}"/>
               </a:ext>
             </a:extLst>
           </p:cNvPr>
@@ -7402,7 +7402,7 @@
           <p:cNvPr id="13" name="">
             <a:extLst xmlns:a="http://schemas.openxmlformats.org/drawingml/2006/main">
               <a:ext uri="{FF2B5EF4-FFF2-40B4-BE49-F238E27FC236}">
-                <a16:creationId xmlns:a16="http://schemas.microsoft.com/office/drawing/2014/main" id="{F9B12FC1-CAD1-48AC-AD25-5AC47A4A3493}"/>
+                <a16:creationId xmlns:a16="http://schemas.microsoft.com/office/drawing/2014/main" id="{A89BA2F2-D5E0-4465-A62B-EB3D74ADF83B}"/>
               </a:ext>
             </a:extLst>
           </p:cNvPr>
@@ -7459,7 +7459,7 @@
           <p:cNvPr id="14" name="">
             <a:extLst xmlns:a="http://schemas.openxmlformats.org/drawingml/2006/main">
               <a:ext uri="{FF2B5EF4-FFF2-40B4-BE49-F238E27FC236}">
-                <a16:creationId xmlns:a16="http://schemas.microsoft.com/office/drawing/2014/main" id="{CF701FD7-699F-44E8-86DC-5B176C772EC7}"/>
+                <a16:creationId xmlns:a16="http://schemas.microsoft.com/office/drawing/2014/main" id="{356A8914-BDD4-4BFC-80D8-50B61D6A7B4B}"/>
               </a:ext>
             </a:extLst>
           </p:cNvPr>
@@ -7516,7 +7516,7 @@
           <p:cNvPr id="15" name="">
             <a:extLst xmlns:a="http://schemas.openxmlformats.org/drawingml/2006/main">
               <a:ext uri="{FF2B5EF4-FFF2-40B4-BE49-F238E27FC236}">
-                <a16:creationId xmlns:a16="http://schemas.microsoft.com/office/drawing/2014/main" id="{654F872D-71EE-4968-A88A-FF93777E9547}"/>
+                <a16:creationId xmlns:a16="http://schemas.microsoft.com/office/drawing/2014/main" id="{5BE89320-1A64-428A-9529-FA219EC4852A}"/>
               </a:ext>
             </a:extLst>
           </p:cNvPr>
@@ -7571,7 +7571,7 @@
     </p:spTree>
     <p:extLst>
       <p:ext uri="{BB962C8B-B14F-4D97-AF65-F5344CB8AC3E}">
-        <p14:creationId xmlns:p14="http://schemas.microsoft.com/office/powerpoint/2010/main" val="427111242"/>
+        <p14:creationId xmlns:p14="http://schemas.microsoft.com/office/powerpoint/2010/main" val="166364638"/>
       </p:ext>
     </p:extLst>
   </p:cSld>
@@ -7769,10 +7769,10 @@
       </p:grpSpPr>
       <p:sp>
         <p:nvSpPr>
-          <p:cNvPr id="23" name="">
-            <a:extLst xmlns:a="http://schemas.openxmlformats.org/drawingml/2006/main">
-              <a:ext uri="{FF2B5EF4-FFF2-40B4-BE49-F238E27FC236}">
-                <a16:creationId xmlns:a16="http://schemas.microsoft.com/office/drawing/2014/main" id="{0D491A72-4825-4466-A2E9-2401A1C403CE}"/>
+          <p:cNvPr id="26" name="">
+            <a:extLst xmlns:a="http://schemas.openxmlformats.org/drawingml/2006/main">
+              <a:ext uri="{FF2B5EF4-FFF2-40B4-BE49-F238E27FC236}">
+                <a16:creationId xmlns:a16="http://schemas.microsoft.com/office/drawing/2014/main" id="{48B841B7-04CE-45C5-AC5E-EF9B18CB0F8A}"/>
               </a:ext>
             </a:extLst>
           </p:cNvPr>
@@ -7804,7 +7804,7 @@
           <p:cNvPr id="2" name="">
             <a:extLst xmlns:a="http://schemas.openxmlformats.org/drawingml/2006/main">
               <a:ext uri="{FF2B5EF4-FFF2-40B4-BE49-F238E27FC236}">
-                <a16:creationId xmlns:a16="http://schemas.microsoft.com/office/drawing/2014/main" id="{36C9C451-9159-4577-A2E4-8D5E0A8AA4D9}"/>
+                <a16:creationId xmlns:a16="http://schemas.microsoft.com/office/drawing/2014/main" id="{C5C59D0E-4F88-445A-8A2E-E0C672A40A52}"/>
               </a:ext>
             </a:extLst>
           </p:cNvPr>
@@ -7861,7 +7861,7 @@
           <p:cNvPr id="3" name="">
             <a:extLst xmlns:a="http://schemas.openxmlformats.org/drawingml/2006/main">
               <a:ext uri="{FF2B5EF4-FFF2-40B4-BE49-F238E27FC236}">
-                <a16:creationId xmlns:a16="http://schemas.microsoft.com/office/drawing/2014/main" id="{0BCE1D72-2C94-490D-B3CC-F01356CE2157}"/>
+                <a16:creationId xmlns:a16="http://schemas.microsoft.com/office/drawing/2014/main" id="{9853B59E-4F48-4953-9D06-D3956270C53D}"/>
               </a:ext>
             </a:extLst>
           </p:cNvPr>
@@ -7893,7 +7893,7 @@
           <p:cNvPr id="4" name="">
             <a:extLst xmlns:a="http://schemas.openxmlformats.org/drawingml/2006/main">
               <a:ext uri="{FF2B5EF4-FFF2-40B4-BE49-F238E27FC236}">
-                <a16:creationId xmlns:a16="http://schemas.microsoft.com/office/drawing/2014/main" id="{E48D90B9-0DE3-4D3E-B093-ACEB10E80AAA}"/>
+                <a16:creationId xmlns:a16="http://schemas.microsoft.com/office/drawing/2014/main" id="{8A589B83-E9DA-49CA-95ED-DB464770E91B}"/>
               </a:ext>
             </a:extLst>
           </p:cNvPr>
@@ -7950,7 +7950,7 @@
           <p:cNvPr id="5" name="">
             <a:extLst xmlns:a="http://schemas.openxmlformats.org/drawingml/2006/main">
               <a:ext uri="{FF2B5EF4-FFF2-40B4-BE49-F238E27FC236}">
-                <a16:creationId xmlns:a16="http://schemas.microsoft.com/office/drawing/2014/main" id="{52C71231-D52B-426C-97A1-8517A0ED5681}"/>
+                <a16:creationId xmlns:a16="http://schemas.microsoft.com/office/drawing/2014/main" id="{CBD7CD52-4987-49CF-8402-2266661AD429}"/>
               </a:ext>
             </a:extLst>
           </p:cNvPr>
@@ -8007,7 +8007,7 @@
           <p:cNvPr id="6" name="">
             <a:extLst xmlns:a="http://schemas.openxmlformats.org/drawingml/2006/main">
               <a:ext uri="{FF2B5EF4-FFF2-40B4-BE49-F238E27FC236}">
-                <a16:creationId xmlns:a16="http://schemas.microsoft.com/office/drawing/2014/main" id="{03E3D3F4-4424-43EF-9F31-66886A1F4D25}"/>
+                <a16:creationId xmlns:a16="http://schemas.microsoft.com/office/drawing/2014/main" id="{906090BD-9A1C-4ECE-BC8B-5D08F9A15323}"/>
               </a:ext>
             </a:extLst>
           </p:cNvPr>
@@ -8064,7 +8064,7 @@
           <p:cNvPr id="7" name="">
             <a:extLst xmlns:a="http://schemas.openxmlformats.org/drawingml/2006/main">
               <a:ext uri="{FF2B5EF4-FFF2-40B4-BE49-F238E27FC236}">
-                <a16:creationId xmlns:a16="http://schemas.microsoft.com/office/drawing/2014/main" id="{CC3A284B-FAD7-40F5-9795-AF32B5E275F2}"/>
+                <a16:creationId xmlns:a16="http://schemas.microsoft.com/office/drawing/2014/main" id="{5E3947EB-1088-4CA7-B74E-55DFCBB8385E}"/>
               </a:ext>
             </a:extLst>
           </p:cNvPr>
@@ -8096,7 +8096,7 @@
           <p:cNvPr id="8" name="">
             <a:extLst xmlns:a="http://schemas.openxmlformats.org/drawingml/2006/main">
               <a:ext uri="{FF2B5EF4-FFF2-40B4-BE49-F238E27FC236}">
-                <a16:creationId xmlns:a16="http://schemas.microsoft.com/office/drawing/2014/main" id="{B1FB5F35-CF2C-4BE6-A3CD-1006958656EC}"/>
+                <a16:creationId xmlns:a16="http://schemas.microsoft.com/office/drawing/2014/main" id="{2DEC950B-7A7A-4032-AF6A-0C3D4F4647F0}"/>
               </a:ext>
             </a:extLst>
           </p:cNvPr>
@@ -8153,7 +8153,7 @@
           <p:cNvPr id="9" name="">
             <a:extLst xmlns:a="http://schemas.openxmlformats.org/drawingml/2006/main">
               <a:ext uri="{FF2B5EF4-FFF2-40B4-BE49-F238E27FC236}">
-                <a16:creationId xmlns:a16="http://schemas.microsoft.com/office/drawing/2014/main" id="{AC898EFF-5D0C-4712-82A6-143F0BC31A83}"/>
+                <a16:creationId xmlns:a16="http://schemas.microsoft.com/office/drawing/2014/main" id="{20F37BA1-921D-40E5-A2AF-D4DD4FDFBFB0}"/>
               </a:ext>
             </a:extLst>
           </p:cNvPr>
@@ -8210,19 +8210,19 @@
           <p:cNvPr id="10" name="">
             <a:extLst xmlns:a="http://schemas.openxmlformats.org/drawingml/2006/main">
               <a:ext uri="{FF2B5EF4-FFF2-40B4-BE49-F238E27FC236}">
-                <a16:creationId xmlns:a16="http://schemas.microsoft.com/office/drawing/2014/main" id="{BC856D11-01C6-452B-873D-D875680286D7}"/>
-              </a:ext>
-            </a:extLst>
-          </p:cNvPr>
-          <p:cNvSpPr>
-            <a:spLocks xmlns:a="http://schemas.openxmlformats.org/drawingml/2006/main" noGrp="1"/>
-          </p:cNvSpPr>
-          <p:nvPr/>
-        </p:nvSpPr>
-        <p:spPr>
-          <a:xfrm xmlns:a="http://schemas.openxmlformats.org/drawingml/2006/main">
-            <a:off x="914400" y="1257300"/>
-            <a:ext cx="10363200" cy="781050"/>
+                <a16:creationId xmlns:a16="http://schemas.microsoft.com/office/drawing/2014/main" id="{79AF5786-D8CF-487E-A7AF-CFACB58D51AC}"/>
+              </a:ext>
+            </a:extLst>
+          </p:cNvPr>
+          <p:cNvSpPr>
+            <a:spLocks xmlns:a="http://schemas.openxmlformats.org/drawingml/2006/main" noGrp="1"/>
+          </p:cNvSpPr>
+          <p:nvPr/>
+        </p:nvSpPr>
+        <p:spPr>
+          <a:xfrm xmlns:a="http://schemas.openxmlformats.org/drawingml/2006/main">
+            <a:off x="857250" y="1219200"/>
+            <a:ext cx="10477500" cy="742950"/>
           </a:xfrm>
           <a:prstGeom xmlns:a="http://schemas.openxmlformats.org/drawingml/2006/main" prst="rect">
             <a:avLst/>
@@ -8239,7 +8239,7 @@
           <a:lstStyle xmlns:a="http://schemas.openxmlformats.org/drawingml/2006/main"/>
           <a:p xmlns:a="http://schemas.openxmlformats.org/drawingml/2006/main">
             <a:pPr algn="ctr">
-              <a:defRPr sz="2175" b="1">
+              <a:defRPr sz="2100" b="1">
                 <a:solidFill>
                   <a:srgbClr val="17253A"/>
                 </a:solidFill>
@@ -8249,7 +8249,7 @@
               </a:defRPr>
             </a:pPr>
             <a:r>
-              <a:rPr sz="2175" b="1">
+              <a:rPr sz="2100" b="1">
                 <a:solidFill>
                   <a:srgbClr val="17253A"/>
                 </a:solidFill>
@@ -8267,28 +8267,30 @@
           <p:cNvPr id="11" name="">
             <a:extLst xmlns:a="http://schemas.openxmlformats.org/drawingml/2006/main">
               <a:ext uri="{FF2B5EF4-FFF2-40B4-BE49-F238E27FC236}">
-                <a16:creationId xmlns:a16="http://schemas.microsoft.com/office/drawing/2014/main" id="{1560552C-E6A4-4F57-9C55-20050995668A}"/>
-              </a:ext>
-            </a:extLst>
-          </p:cNvPr>
-          <p:cNvSpPr>
-            <a:spLocks xmlns:a="http://schemas.openxmlformats.org/drawingml/2006/main" noGrp="1"/>
-          </p:cNvSpPr>
-          <p:nvPr/>
-        </p:nvSpPr>
-        <p:spPr>
-          <a:xfrm xmlns:a="http://schemas.openxmlformats.org/drawingml/2006/main">
-            <a:off x="1000125" y="2247900"/>
-            <a:ext cx="476250" cy="476250"/>
-          </a:xfrm>
-          <a:prstGeom xmlns:a="http://schemas.openxmlformats.org/drawingml/2006/main" prst="ellipse">
+                <a16:creationId xmlns:a16="http://schemas.microsoft.com/office/drawing/2014/main" id="{01BFAF1E-052B-4189-A78D-4FB4AE1B3C3B}"/>
+              </a:ext>
+            </a:extLst>
+          </p:cNvPr>
+          <p:cNvSpPr>
+            <a:spLocks xmlns:a="http://schemas.openxmlformats.org/drawingml/2006/main" noGrp="1"/>
+          </p:cNvSpPr>
+          <p:nvPr/>
+        </p:nvSpPr>
+        <p:spPr>
+          <a:xfrm xmlns:a="http://schemas.openxmlformats.org/drawingml/2006/main">
+            <a:off x="971550" y="2124075"/>
+            <a:ext cx="38100" cy="3524250"/>
+          </a:xfrm>
+          <a:prstGeom xmlns:a="http://schemas.openxmlformats.org/drawingml/2006/main" prst="rect">
             <a:avLst/>
           </a:prstGeom>
           <a:solidFill xmlns:a="http://schemas.openxmlformats.org/drawingml/2006/main">
-            <a:srgbClr val="18324A"/>
+            <a:srgbClr val="2C6E73"/>
           </a:solidFill>
           <a:ln xmlns:a="http://schemas.openxmlformats.org/drawingml/2006/main" w="0">
-            <a:noFill/>
+            <a:solidFill>
+              <a:srgbClr val="2C6E73"/>
+            </a:solidFill>
           </a:ln>
         </p:spPr>
       </p:sp>
@@ -8297,19 +8299,19 @@
           <p:cNvPr id="12" name="">
             <a:extLst xmlns:a="http://schemas.openxmlformats.org/drawingml/2006/main">
               <a:ext uri="{FF2B5EF4-FFF2-40B4-BE49-F238E27FC236}">
-                <a16:creationId xmlns:a16="http://schemas.microsoft.com/office/drawing/2014/main" id="{07533A2B-2509-4912-9FFB-81948E226655}"/>
-              </a:ext>
-            </a:extLst>
-          </p:cNvPr>
-          <p:cNvSpPr>
-            <a:spLocks xmlns:a="http://schemas.openxmlformats.org/drawingml/2006/main" noGrp="1"/>
-          </p:cNvSpPr>
-          <p:nvPr/>
-        </p:nvSpPr>
-        <p:spPr>
-          <a:xfrm xmlns:a="http://schemas.openxmlformats.org/drawingml/2006/main">
-            <a:off x="1000125" y="2276475"/>
-            <a:ext cx="476250" cy="419100"/>
+                <a16:creationId xmlns:a16="http://schemas.microsoft.com/office/drawing/2014/main" id="{FAE90623-FD38-41CE-B0C7-10F62B508EE8}"/>
+              </a:ext>
+            </a:extLst>
+          </p:cNvPr>
+          <p:cNvSpPr>
+            <a:spLocks xmlns:a="http://schemas.openxmlformats.org/drawingml/2006/main" noGrp="1"/>
+          </p:cNvSpPr>
+          <p:nvPr/>
+        </p:nvSpPr>
+        <p:spPr>
+          <a:xfrm xmlns:a="http://schemas.openxmlformats.org/drawingml/2006/main">
+            <a:off x="1162050" y="2200275"/>
+            <a:ext cx="400050" cy="400050"/>
           </a:xfrm>
           <a:prstGeom xmlns:a="http://schemas.openxmlformats.org/drawingml/2006/main" prst="rect">
             <a:avLst/>
@@ -8326,9 +8328,9 @@
           <a:lstStyle xmlns:a="http://schemas.openxmlformats.org/drawingml/2006/main"/>
           <a:p xmlns:a="http://schemas.openxmlformats.org/drawingml/2006/main">
             <a:pPr algn="ctr">
-              <a:defRPr sz="1350" b="1">
-                <a:solidFill>
-                  <a:srgbClr val="FFFFFF"/>
+              <a:defRPr sz="1125" b="1">
+                <a:solidFill>
+                  <a:srgbClr val="2C6E73"/>
                 </a:solidFill>
                 <a:latin typeface="Arial"/>
                 <a:ea typeface="Arial"/>
@@ -8336,9 +8338,9 @@
               </a:defRPr>
             </a:pPr>
             <a:r>
-              <a:rPr sz="1350" b="1">
-                <a:solidFill>
-                  <a:srgbClr val="FFFFFF"/>
+              <a:rPr sz="1125" b="1">
+                <a:solidFill>
+                  <a:srgbClr val="2C6E73"/>
                 </a:solidFill>
                 <a:latin typeface="Arial"/>
                 <a:ea typeface="Arial"/>
@@ -8354,19 +8356,19 @@
           <p:cNvPr id="13" name="">
             <a:extLst xmlns:a="http://schemas.openxmlformats.org/drawingml/2006/main">
               <a:ext uri="{FF2B5EF4-FFF2-40B4-BE49-F238E27FC236}">
-                <a16:creationId xmlns:a16="http://schemas.microsoft.com/office/drawing/2014/main" id="{32E39F12-C477-4412-AEF2-9738846B099A}"/>
-              </a:ext>
-            </a:extLst>
-          </p:cNvPr>
-          <p:cNvSpPr>
-            <a:spLocks xmlns:a="http://schemas.openxmlformats.org/drawingml/2006/main" noGrp="1"/>
-          </p:cNvSpPr>
-          <p:nvPr/>
-        </p:nvSpPr>
-        <p:spPr>
-          <a:xfrm xmlns:a="http://schemas.openxmlformats.org/drawingml/2006/main">
-            <a:off x="1714500" y="2181225"/>
-            <a:ext cx="9429750" cy="609600"/>
+                <a16:creationId xmlns:a16="http://schemas.microsoft.com/office/drawing/2014/main" id="{1B5CDCC5-EFCB-4B69-9AA2-D7A2ED08724A}"/>
+              </a:ext>
+            </a:extLst>
+          </p:cNvPr>
+          <p:cNvSpPr>
+            <a:spLocks xmlns:a="http://schemas.openxmlformats.org/drawingml/2006/main" noGrp="1"/>
+          </p:cNvSpPr>
+          <p:nvPr/>
+        </p:nvSpPr>
+        <p:spPr>
+          <a:xfrm xmlns:a="http://schemas.openxmlformats.org/drawingml/2006/main">
+            <a:off x="1714500" y="2114550"/>
+            <a:ext cx="9525000" cy="638175"/>
           </a:xfrm>
           <a:prstGeom xmlns:a="http://schemas.openxmlformats.org/drawingml/2006/main" prst="rect">
             <a:avLst/>
@@ -8383,7 +8385,7 @@
           <a:lstStyle xmlns:a="http://schemas.openxmlformats.org/drawingml/2006/main"/>
           <a:p xmlns:a="http://schemas.openxmlformats.org/drawingml/2006/main">
             <a:pPr algn="l">
-              <a:defRPr sz="1500" b="0">
+              <a:defRPr sz="1575" b="0">
                 <a:solidFill>
                   <a:srgbClr val="17253A"/>
                 </a:solidFill>
@@ -8393,7 +8395,7 @@
               </a:defRPr>
             </a:pPr>
             <a:r>
-              <a:rPr sz="1500" b="0">
+              <a:rPr sz="1575" b="0">
                 <a:solidFill>
                   <a:srgbClr val="17253A"/>
                 </a:solidFill>
@@ -8401,7 +8403,7 @@
                 <a:ea typeface="Arial"/>
                 <a:cs typeface="Arial"/>
               </a:rPr>
-              <a:t>Identify the structure: Identify useful common factors or a common denominator.</a:t>
+              <a:t>3/5 and 2/3</a:t>
             </a:r>
           </a:p>
         </p:txBody>
@@ -8411,28 +8413,30 @@
           <p:cNvPr id="14" name="">
             <a:extLst xmlns:a="http://schemas.openxmlformats.org/drawingml/2006/main">
               <a:ext uri="{FF2B5EF4-FFF2-40B4-BE49-F238E27FC236}">
-                <a16:creationId xmlns:a16="http://schemas.microsoft.com/office/drawing/2014/main" id="{AEECB237-0B66-42F9-B39D-F9CF3C83BB35}"/>
-              </a:ext>
-            </a:extLst>
-          </p:cNvPr>
-          <p:cNvSpPr>
-            <a:spLocks xmlns:a="http://schemas.openxmlformats.org/drawingml/2006/main" noGrp="1"/>
-          </p:cNvSpPr>
-          <p:nvPr/>
-        </p:nvSpPr>
-        <p:spPr>
-          <a:xfrm xmlns:a="http://schemas.openxmlformats.org/drawingml/2006/main">
-            <a:off x="1000125" y="2990850"/>
-            <a:ext cx="476250" cy="476250"/>
-          </a:xfrm>
-          <a:prstGeom xmlns:a="http://schemas.openxmlformats.org/drawingml/2006/main" prst="ellipse">
+                <a16:creationId xmlns:a16="http://schemas.microsoft.com/office/drawing/2014/main" id="{B67747DA-DC89-4D5A-866B-FDAF4646FE33}"/>
+              </a:ext>
+            </a:extLst>
+          </p:cNvPr>
+          <p:cNvSpPr>
+            <a:spLocks xmlns:a="http://schemas.openxmlformats.org/drawingml/2006/main" noGrp="1"/>
+          </p:cNvSpPr>
+          <p:nvPr/>
+        </p:nvSpPr>
+        <p:spPr>
+          <a:xfrm xmlns:a="http://schemas.openxmlformats.org/drawingml/2006/main">
+            <a:off x="1714500" y="2771775"/>
+            <a:ext cx="9334500" cy="9525"/>
+          </a:xfrm>
+          <a:prstGeom xmlns:a="http://schemas.openxmlformats.org/drawingml/2006/main" prst="rect">
             <a:avLst/>
           </a:prstGeom>
           <a:solidFill xmlns:a="http://schemas.openxmlformats.org/drawingml/2006/main">
-            <a:srgbClr val="2C6E73"/>
+            <a:srgbClr val="D9E0E6"/>
           </a:solidFill>
           <a:ln xmlns:a="http://schemas.openxmlformats.org/drawingml/2006/main" w="0">
-            <a:noFill/>
+            <a:solidFill>
+              <a:srgbClr val="D9E0E6"/>
+            </a:solidFill>
           </a:ln>
         </p:spPr>
       </p:sp>
@@ -8441,19 +8445,19 @@
           <p:cNvPr id="15" name="">
             <a:extLst xmlns:a="http://schemas.openxmlformats.org/drawingml/2006/main">
               <a:ext uri="{FF2B5EF4-FFF2-40B4-BE49-F238E27FC236}">
-                <a16:creationId xmlns:a16="http://schemas.microsoft.com/office/drawing/2014/main" id="{7041D79A-7CF1-4351-8087-86E8784AAD3E}"/>
-              </a:ext>
-            </a:extLst>
-          </p:cNvPr>
-          <p:cNvSpPr>
-            <a:spLocks xmlns:a="http://schemas.openxmlformats.org/drawingml/2006/main" noGrp="1"/>
-          </p:cNvSpPr>
-          <p:nvPr/>
-        </p:nvSpPr>
-        <p:spPr>
-          <a:xfrm xmlns:a="http://schemas.openxmlformats.org/drawingml/2006/main">
-            <a:off x="1000125" y="3019425"/>
-            <a:ext cx="476250" cy="419100"/>
+                <a16:creationId xmlns:a16="http://schemas.microsoft.com/office/drawing/2014/main" id="{1E63CACA-A15A-4A7C-8252-14C5B73CA3FF}"/>
+              </a:ext>
+            </a:extLst>
+          </p:cNvPr>
+          <p:cNvSpPr>
+            <a:spLocks xmlns:a="http://schemas.openxmlformats.org/drawingml/2006/main" noGrp="1"/>
+          </p:cNvSpPr>
+          <p:nvPr/>
+        </p:nvSpPr>
+        <p:spPr>
+          <a:xfrm xmlns:a="http://schemas.openxmlformats.org/drawingml/2006/main">
+            <a:off x="1162050" y="2905125"/>
+            <a:ext cx="400050" cy="400050"/>
           </a:xfrm>
           <a:prstGeom xmlns:a="http://schemas.openxmlformats.org/drawingml/2006/main" prst="rect">
             <a:avLst/>
@@ -8470,9 +8474,9 @@
           <a:lstStyle xmlns:a="http://schemas.openxmlformats.org/drawingml/2006/main"/>
           <a:p xmlns:a="http://schemas.openxmlformats.org/drawingml/2006/main">
             <a:pPr algn="ctr">
-              <a:defRPr sz="1350" b="1">
-                <a:solidFill>
-                  <a:srgbClr val="FFFFFF"/>
+              <a:defRPr sz="1125" b="1">
+                <a:solidFill>
+                  <a:srgbClr val="2C6E73"/>
                 </a:solidFill>
                 <a:latin typeface="Arial"/>
                 <a:ea typeface="Arial"/>
@@ -8480,9 +8484,9 @@
               </a:defRPr>
             </a:pPr>
             <a:r>
-              <a:rPr sz="1350" b="1">
-                <a:solidFill>
-                  <a:srgbClr val="FFFFFF"/>
+              <a:rPr sz="1125" b="1">
+                <a:solidFill>
+                  <a:srgbClr val="2C6E73"/>
                 </a:solidFill>
                 <a:latin typeface="Arial"/>
                 <a:ea typeface="Arial"/>
@@ -8498,19 +8502,19 @@
           <p:cNvPr id="16" name="">
             <a:extLst xmlns:a="http://schemas.openxmlformats.org/drawingml/2006/main">
               <a:ext uri="{FF2B5EF4-FFF2-40B4-BE49-F238E27FC236}">
-                <a16:creationId xmlns:a16="http://schemas.microsoft.com/office/drawing/2014/main" id="{756E0529-EFBA-4E28-B5DD-36AEC21D3965}"/>
-              </a:ext>
-            </a:extLst>
-          </p:cNvPr>
-          <p:cNvSpPr>
-            <a:spLocks xmlns:a="http://schemas.openxmlformats.org/drawingml/2006/main" noGrp="1"/>
-          </p:cNvSpPr>
-          <p:nvPr/>
-        </p:nvSpPr>
-        <p:spPr>
-          <a:xfrm xmlns:a="http://schemas.openxmlformats.org/drawingml/2006/main">
-            <a:off x="1714500" y="2924175"/>
-            <a:ext cx="9429750" cy="609600"/>
+                <a16:creationId xmlns:a16="http://schemas.microsoft.com/office/drawing/2014/main" id="{3AC168CB-3AC6-4C51-A308-21D59F299B25}"/>
+              </a:ext>
+            </a:extLst>
+          </p:cNvPr>
+          <p:cNvSpPr>
+            <a:spLocks xmlns:a="http://schemas.openxmlformats.org/drawingml/2006/main" noGrp="1"/>
+          </p:cNvSpPr>
+          <p:nvPr/>
+        </p:nvSpPr>
+        <p:spPr>
+          <a:xfrm xmlns:a="http://schemas.openxmlformats.org/drawingml/2006/main">
+            <a:off x="1714500" y="2819400"/>
+            <a:ext cx="9525000" cy="638175"/>
           </a:xfrm>
           <a:prstGeom xmlns:a="http://schemas.openxmlformats.org/drawingml/2006/main" prst="rect">
             <a:avLst/>
@@ -8527,7 +8531,7 @@
           <a:lstStyle xmlns:a="http://schemas.openxmlformats.org/drawingml/2006/main"/>
           <a:p xmlns:a="http://schemas.openxmlformats.org/drawingml/2006/main">
             <a:pPr algn="l">
-              <a:defRPr sz="1500" b="0">
+              <a:defRPr sz="1575" b="0">
                 <a:solidFill>
                   <a:srgbClr val="17253A"/>
                 </a:solidFill>
@@ -8537,7 +8541,7 @@
               </a:defRPr>
             </a:pPr>
             <a:r>
-              <a:rPr sz="1500" b="0">
+              <a:rPr sz="1575" b="0">
                 <a:solidFill>
                   <a:srgbClr val="17253A"/>
                 </a:solidFill>
@@ -8545,7 +8549,7 @@
                 <a:ea typeface="Arial"/>
                 <a:cs typeface="Arial"/>
               </a:rPr>
-              <a:t>Set up the method: Convert or simplify without changing the fraction's value.</a:t>
+              <a:t>Use denominator 120</a:t>
             </a:r>
           </a:p>
         </p:txBody>
@@ -8555,28 +8559,30 @@
           <p:cNvPr id="17" name="">
             <a:extLst xmlns:a="http://schemas.openxmlformats.org/drawingml/2006/main">
               <a:ext uri="{FF2B5EF4-FFF2-40B4-BE49-F238E27FC236}">
-                <a16:creationId xmlns:a16="http://schemas.microsoft.com/office/drawing/2014/main" id="{FC67BFCF-55CB-49A9-B30A-3C3BA11F0077}"/>
-              </a:ext>
-            </a:extLst>
-          </p:cNvPr>
-          <p:cNvSpPr>
-            <a:spLocks xmlns:a="http://schemas.openxmlformats.org/drawingml/2006/main" noGrp="1"/>
-          </p:cNvSpPr>
-          <p:nvPr/>
-        </p:nvSpPr>
-        <p:spPr>
-          <a:xfrm xmlns:a="http://schemas.openxmlformats.org/drawingml/2006/main">
-            <a:off x="1000125" y="3733800"/>
-            <a:ext cx="476250" cy="476250"/>
-          </a:xfrm>
-          <a:prstGeom xmlns:a="http://schemas.openxmlformats.org/drawingml/2006/main" prst="ellipse">
+                <a16:creationId xmlns:a16="http://schemas.microsoft.com/office/drawing/2014/main" id="{E961963E-C5F2-4EEB-A7F7-B66F88BC2E31}"/>
+              </a:ext>
+            </a:extLst>
+          </p:cNvPr>
+          <p:cNvSpPr>
+            <a:spLocks xmlns:a="http://schemas.openxmlformats.org/drawingml/2006/main" noGrp="1"/>
+          </p:cNvSpPr>
+          <p:nvPr/>
+        </p:nvSpPr>
+        <p:spPr>
+          <a:xfrm xmlns:a="http://schemas.openxmlformats.org/drawingml/2006/main">
+            <a:off x="1714500" y="3476625"/>
+            <a:ext cx="9334500" cy="9525"/>
+          </a:xfrm>
+          <a:prstGeom xmlns:a="http://schemas.openxmlformats.org/drawingml/2006/main" prst="rect">
             <a:avLst/>
           </a:prstGeom>
           <a:solidFill xmlns:a="http://schemas.openxmlformats.org/drawingml/2006/main">
-            <a:srgbClr val="2C6E73"/>
+            <a:srgbClr val="D9E0E6"/>
           </a:solidFill>
           <a:ln xmlns:a="http://schemas.openxmlformats.org/drawingml/2006/main" w="0">
-            <a:noFill/>
+            <a:solidFill>
+              <a:srgbClr val="D9E0E6"/>
+            </a:solidFill>
           </a:ln>
         </p:spPr>
       </p:sp>
@@ -8585,19 +8591,19 @@
           <p:cNvPr id="18" name="">
             <a:extLst xmlns:a="http://schemas.openxmlformats.org/drawingml/2006/main">
               <a:ext uri="{FF2B5EF4-FFF2-40B4-BE49-F238E27FC236}">
-                <a16:creationId xmlns:a16="http://schemas.microsoft.com/office/drawing/2014/main" id="{FA22E8ED-2091-43FF-8B7E-BEA45E6988C1}"/>
-              </a:ext>
-            </a:extLst>
-          </p:cNvPr>
-          <p:cNvSpPr>
-            <a:spLocks xmlns:a="http://schemas.openxmlformats.org/drawingml/2006/main" noGrp="1"/>
-          </p:cNvSpPr>
-          <p:nvPr/>
-        </p:nvSpPr>
-        <p:spPr>
-          <a:xfrm xmlns:a="http://schemas.openxmlformats.org/drawingml/2006/main">
-            <a:off x="1000125" y="3762375"/>
-            <a:ext cx="476250" cy="419100"/>
+                <a16:creationId xmlns:a16="http://schemas.microsoft.com/office/drawing/2014/main" id="{91D579CC-A063-4345-9D38-E964BF3E688B}"/>
+              </a:ext>
+            </a:extLst>
+          </p:cNvPr>
+          <p:cNvSpPr>
+            <a:spLocks xmlns:a="http://schemas.openxmlformats.org/drawingml/2006/main" noGrp="1"/>
+          </p:cNvSpPr>
+          <p:nvPr/>
+        </p:nvSpPr>
+        <p:spPr>
+          <a:xfrm xmlns:a="http://schemas.openxmlformats.org/drawingml/2006/main">
+            <a:off x="1162050" y="3609975"/>
+            <a:ext cx="400050" cy="400050"/>
           </a:xfrm>
           <a:prstGeom xmlns:a="http://schemas.openxmlformats.org/drawingml/2006/main" prst="rect">
             <a:avLst/>
@@ -8614,9 +8620,9 @@
           <a:lstStyle xmlns:a="http://schemas.openxmlformats.org/drawingml/2006/main"/>
           <a:p xmlns:a="http://schemas.openxmlformats.org/drawingml/2006/main">
             <a:pPr algn="ctr">
-              <a:defRPr sz="1350" b="1">
-                <a:solidFill>
-                  <a:srgbClr val="FFFFFF"/>
+              <a:defRPr sz="1125" b="1">
+                <a:solidFill>
+                  <a:srgbClr val="2C6E73"/>
                 </a:solidFill>
                 <a:latin typeface="Arial"/>
                 <a:ea typeface="Arial"/>
@@ -8624,9 +8630,9 @@
               </a:defRPr>
             </a:pPr>
             <a:r>
-              <a:rPr sz="1350" b="1">
-                <a:solidFill>
-                  <a:srgbClr val="FFFFFF"/>
+              <a:rPr sz="1125" b="1">
+                <a:solidFill>
+                  <a:srgbClr val="2C6E73"/>
                 </a:solidFill>
                 <a:latin typeface="Arial"/>
                 <a:ea typeface="Arial"/>
@@ -8642,19 +8648,19 @@
           <p:cNvPr id="19" name="">
             <a:extLst xmlns:a="http://schemas.openxmlformats.org/drawingml/2006/main">
               <a:ext uri="{FF2B5EF4-FFF2-40B4-BE49-F238E27FC236}">
-                <a16:creationId xmlns:a16="http://schemas.microsoft.com/office/drawing/2014/main" id="{FCCED175-7BE0-45BF-B219-323651F44661}"/>
-              </a:ext>
-            </a:extLst>
-          </p:cNvPr>
-          <p:cNvSpPr>
-            <a:spLocks xmlns:a="http://schemas.openxmlformats.org/drawingml/2006/main" noGrp="1"/>
-          </p:cNvSpPr>
-          <p:nvPr/>
-        </p:nvSpPr>
-        <p:spPr>
-          <a:xfrm xmlns:a="http://schemas.openxmlformats.org/drawingml/2006/main">
-            <a:off x="1714500" y="3667125"/>
-            <a:ext cx="9429750" cy="609600"/>
+                <a16:creationId xmlns:a16="http://schemas.microsoft.com/office/drawing/2014/main" id="{15BB8633-2064-40EF-8BFB-A52F4B668036}"/>
+              </a:ext>
+            </a:extLst>
+          </p:cNvPr>
+          <p:cNvSpPr>
+            <a:spLocks xmlns:a="http://schemas.openxmlformats.org/drawingml/2006/main" noGrp="1"/>
+          </p:cNvSpPr>
+          <p:nvPr/>
+        </p:nvSpPr>
+        <p:spPr>
+          <a:xfrm xmlns:a="http://schemas.openxmlformats.org/drawingml/2006/main">
+            <a:off x="1714500" y="3524250"/>
+            <a:ext cx="9525000" cy="638175"/>
           </a:xfrm>
           <a:prstGeom xmlns:a="http://schemas.openxmlformats.org/drawingml/2006/main" prst="rect">
             <a:avLst/>
@@ -8671,7 +8677,7 @@
           <a:lstStyle xmlns:a="http://schemas.openxmlformats.org/drawingml/2006/main"/>
           <a:p xmlns:a="http://schemas.openxmlformats.org/drawingml/2006/main">
             <a:pPr algn="l">
-              <a:defRPr sz="1500" b="0">
+              <a:defRPr sz="1575" b="0">
                 <a:solidFill>
                   <a:srgbClr val="17253A"/>
                 </a:solidFill>
@@ -8681,7 +8687,7 @@
               </a:defRPr>
             </a:pPr>
             <a:r>
-              <a:rPr sz="1500" b="0">
+              <a:rPr sz="1575" b="0">
                 <a:solidFill>
                   <a:srgbClr val="17253A"/>
                 </a:solidFill>
@@ -8689,7 +8695,7 @@
                 <a:ea typeface="Arial"/>
                 <a:cs typeface="Arial"/>
               </a:rPr>
-              <a:t>Complete the calculation: 5/8 is one possible answer.</a:t>
+              <a:t>3/5 = 72/120     2/3 = 80/120</a:t>
             </a:r>
           </a:p>
         </p:txBody>
@@ -8699,28 +8705,30 @@
           <p:cNvPr id="20" name="">
             <a:extLst xmlns:a="http://schemas.openxmlformats.org/drawingml/2006/main">
               <a:ext uri="{FF2B5EF4-FFF2-40B4-BE49-F238E27FC236}">
-                <a16:creationId xmlns:a16="http://schemas.microsoft.com/office/drawing/2014/main" id="{9A38D86C-D734-4D63-9C7B-09AFF11305DC}"/>
-              </a:ext>
-            </a:extLst>
-          </p:cNvPr>
-          <p:cNvSpPr>
-            <a:spLocks xmlns:a="http://schemas.openxmlformats.org/drawingml/2006/main" noGrp="1"/>
-          </p:cNvSpPr>
-          <p:nvPr/>
-        </p:nvSpPr>
-        <p:spPr>
-          <a:xfrm xmlns:a="http://schemas.openxmlformats.org/drawingml/2006/main">
-            <a:off x="1000125" y="4476750"/>
-            <a:ext cx="476250" cy="476250"/>
-          </a:xfrm>
-          <a:prstGeom xmlns:a="http://schemas.openxmlformats.org/drawingml/2006/main" prst="ellipse">
+                <a16:creationId xmlns:a16="http://schemas.microsoft.com/office/drawing/2014/main" id="{1F467BA7-0BF9-4C7A-B8AD-FBD5B7810D66}"/>
+              </a:ext>
+            </a:extLst>
+          </p:cNvPr>
+          <p:cNvSpPr>
+            <a:spLocks xmlns:a="http://schemas.openxmlformats.org/drawingml/2006/main" noGrp="1"/>
+          </p:cNvSpPr>
+          <p:nvPr/>
+        </p:nvSpPr>
+        <p:spPr>
+          <a:xfrm xmlns:a="http://schemas.openxmlformats.org/drawingml/2006/main">
+            <a:off x="1714500" y="4181475"/>
+            <a:ext cx="9334500" cy="9525"/>
+          </a:xfrm>
+          <a:prstGeom xmlns:a="http://schemas.openxmlformats.org/drawingml/2006/main" prst="rect">
             <a:avLst/>
           </a:prstGeom>
           <a:solidFill xmlns:a="http://schemas.openxmlformats.org/drawingml/2006/main">
-            <a:srgbClr val="2C6E73"/>
+            <a:srgbClr val="D9E0E6"/>
           </a:solidFill>
           <a:ln xmlns:a="http://schemas.openxmlformats.org/drawingml/2006/main" w="0">
-            <a:noFill/>
+            <a:solidFill>
+              <a:srgbClr val="D9E0E6"/>
+            </a:solidFill>
           </a:ln>
         </p:spPr>
       </p:sp>
@@ -8729,19 +8737,19 @@
           <p:cNvPr id="21" name="">
             <a:extLst xmlns:a="http://schemas.openxmlformats.org/drawingml/2006/main">
               <a:ext uri="{FF2B5EF4-FFF2-40B4-BE49-F238E27FC236}">
-                <a16:creationId xmlns:a16="http://schemas.microsoft.com/office/drawing/2014/main" id="{26EEC86A-1B21-49DD-B6A3-8E9895436634}"/>
-              </a:ext>
-            </a:extLst>
-          </p:cNvPr>
-          <p:cNvSpPr>
-            <a:spLocks xmlns:a="http://schemas.openxmlformats.org/drawingml/2006/main" noGrp="1"/>
-          </p:cNvSpPr>
-          <p:nvPr/>
-        </p:nvSpPr>
-        <p:spPr>
-          <a:xfrm xmlns:a="http://schemas.openxmlformats.org/drawingml/2006/main">
-            <a:off x="1000125" y="4505325"/>
-            <a:ext cx="476250" cy="419100"/>
+                <a16:creationId xmlns:a16="http://schemas.microsoft.com/office/drawing/2014/main" id="{76C94E8F-DDE5-4E23-8AB2-A11591B46F0E}"/>
+              </a:ext>
+            </a:extLst>
+          </p:cNvPr>
+          <p:cNvSpPr>
+            <a:spLocks xmlns:a="http://schemas.openxmlformats.org/drawingml/2006/main" noGrp="1"/>
+          </p:cNvSpPr>
+          <p:nvPr/>
+        </p:nvSpPr>
+        <p:spPr>
+          <a:xfrm xmlns:a="http://schemas.openxmlformats.org/drawingml/2006/main">
+            <a:off x="1162050" y="4314825"/>
+            <a:ext cx="400050" cy="400050"/>
           </a:xfrm>
           <a:prstGeom xmlns:a="http://schemas.openxmlformats.org/drawingml/2006/main" prst="rect">
             <a:avLst/>
@@ -8758,9 +8766,9 @@
           <a:lstStyle xmlns:a="http://schemas.openxmlformats.org/drawingml/2006/main"/>
           <a:p xmlns:a="http://schemas.openxmlformats.org/drawingml/2006/main">
             <a:pPr algn="ctr">
-              <a:defRPr sz="1350" b="1">
-                <a:solidFill>
-                  <a:srgbClr val="FFFFFF"/>
+              <a:defRPr sz="1125" b="1">
+                <a:solidFill>
+                  <a:srgbClr val="2C6E73"/>
                 </a:solidFill>
                 <a:latin typeface="Arial"/>
                 <a:ea typeface="Arial"/>
@@ -8768,9 +8776,9 @@
               </a:defRPr>
             </a:pPr>
             <a:r>
-              <a:rPr sz="1350" b="1">
-                <a:solidFill>
-                  <a:srgbClr val="FFFFFF"/>
+              <a:rPr sz="1125" b="1">
+                <a:solidFill>
+                  <a:srgbClr val="2C6E73"/>
                 </a:solidFill>
                 <a:latin typeface="Arial"/>
                 <a:ea typeface="Arial"/>
@@ -8786,19 +8794,19 @@
           <p:cNvPr id="22" name="">
             <a:extLst xmlns:a="http://schemas.openxmlformats.org/drawingml/2006/main">
               <a:ext uri="{FF2B5EF4-FFF2-40B4-BE49-F238E27FC236}">
-                <a16:creationId xmlns:a16="http://schemas.microsoft.com/office/drawing/2014/main" id="{78E78565-B940-4D3C-8A4C-71B11F9BDA5A}"/>
-              </a:ext>
-            </a:extLst>
-          </p:cNvPr>
-          <p:cNvSpPr>
-            <a:spLocks xmlns:a="http://schemas.openxmlformats.org/drawingml/2006/main" noGrp="1"/>
-          </p:cNvSpPr>
-          <p:nvPr/>
-        </p:nvSpPr>
-        <p:spPr>
-          <a:xfrm xmlns:a="http://schemas.openxmlformats.org/drawingml/2006/main">
-            <a:off x="1714500" y="4410075"/>
-            <a:ext cx="9429750" cy="609600"/>
+                <a16:creationId xmlns:a16="http://schemas.microsoft.com/office/drawing/2014/main" id="{CC13F704-52C0-4C8E-9183-53BF56F9D2AC}"/>
+              </a:ext>
+            </a:extLst>
+          </p:cNvPr>
+          <p:cNvSpPr>
+            <a:spLocks xmlns:a="http://schemas.openxmlformats.org/drawingml/2006/main" noGrp="1"/>
+          </p:cNvSpPr>
+          <p:nvPr/>
+        </p:nvSpPr>
+        <p:spPr>
+          <a:xfrm xmlns:a="http://schemas.openxmlformats.org/drawingml/2006/main">
+            <a:off x="1714500" y="4229100"/>
+            <a:ext cx="9525000" cy="638175"/>
           </a:xfrm>
           <a:prstGeom xmlns:a="http://schemas.openxmlformats.org/drawingml/2006/main" prst="rect">
             <a:avLst/>
@@ -8815,9 +8823,9 @@
           <a:lstStyle xmlns:a="http://schemas.openxmlformats.org/drawingml/2006/main"/>
           <a:p xmlns:a="http://schemas.openxmlformats.org/drawingml/2006/main">
             <a:pPr algn="l">
-              <a:defRPr sz="1500" b="1">
-                <a:solidFill>
-                  <a:srgbClr val="2F785D"/>
+              <a:defRPr sz="1575" b="0">
+                <a:solidFill>
+                  <a:srgbClr val="17253A"/>
                 </a:solidFill>
                 <a:latin typeface="Arial"/>
                 <a:ea typeface="Arial"/>
@@ -8825,15 +8833,161 @@
               </a:defRPr>
             </a:pPr>
             <a:r>
-              <a:rPr sz="1500" b="1">
+              <a:rPr sz="1575" b="0">
+                <a:solidFill>
+                  <a:srgbClr val="17253A"/>
+                </a:solidFill>
+                <a:latin typeface="Arial"/>
+                <a:ea typeface="Arial"/>
+                <a:cs typeface="Arial"/>
+              </a:rPr>
+              <a:t>75/120 lies between 72/120 and 80/120</a:t>
+            </a:r>
+          </a:p>
+        </p:txBody>
+      </p:sp>
+      <p:sp>
+        <p:nvSpPr>
+          <p:cNvPr id="23" name="">
+            <a:extLst xmlns:a="http://schemas.openxmlformats.org/drawingml/2006/main">
+              <a:ext uri="{FF2B5EF4-FFF2-40B4-BE49-F238E27FC236}">
+                <a16:creationId xmlns:a16="http://schemas.microsoft.com/office/drawing/2014/main" id="{70099D8E-9F06-4809-AFAB-C92535635364}"/>
+              </a:ext>
+            </a:extLst>
+          </p:cNvPr>
+          <p:cNvSpPr>
+            <a:spLocks xmlns:a="http://schemas.openxmlformats.org/drawingml/2006/main" noGrp="1"/>
+          </p:cNvSpPr>
+          <p:nvPr/>
+        </p:nvSpPr>
+        <p:spPr>
+          <a:xfrm xmlns:a="http://schemas.openxmlformats.org/drawingml/2006/main">
+            <a:off x="1714500" y="4886325"/>
+            <a:ext cx="9334500" cy="9525"/>
+          </a:xfrm>
+          <a:prstGeom xmlns:a="http://schemas.openxmlformats.org/drawingml/2006/main" prst="rect">
+            <a:avLst/>
+          </a:prstGeom>
+          <a:solidFill xmlns:a="http://schemas.openxmlformats.org/drawingml/2006/main">
+            <a:srgbClr val="D9E0E6"/>
+          </a:solidFill>
+          <a:ln xmlns:a="http://schemas.openxmlformats.org/drawingml/2006/main" w="0">
+            <a:solidFill>
+              <a:srgbClr val="D9E0E6"/>
+            </a:solidFill>
+          </a:ln>
+        </p:spPr>
+      </p:sp>
+      <p:sp>
+        <p:nvSpPr>
+          <p:cNvPr id="24" name="">
+            <a:extLst xmlns:a="http://schemas.openxmlformats.org/drawingml/2006/main">
+              <a:ext uri="{FF2B5EF4-FFF2-40B4-BE49-F238E27FC236}">
+                <a16:creationId xmlns:a16="http://schemas.microsoft.com/office/drawing/2014/main" id="{2A688978-1B24-48D3-B851-E017CCD69974}"/>
+              </a:ext>
+            </a:extLst>
+          </p:cNvPr>
+          <p:cNvSpPr>
+            <a:spLocks xmlns:a="http://schemas.openxmlformats.org/drawingml/2006/main" noGrp="1"/>
+          </p:cNvSpPr>
+          <p:nvPr/>
+        </p:nvSpPr>
+        <p:spPr>
+          <a:xfrm xmlns:a="http://schemas.openxmlformats.org/drawingml/2006/main">
+            <a:off x="1162050" y="5019675"/>
+            <a:ext cx="400050" cy="400050"/>
+          </a:xfrm>
+          <a:prstGeom xmlns:a="http://schemas.openxmlformats.org/drawingml/2006/main" prst="rect">
+            <a:avLst/>
+          </a:prstGeom>
+          <a:noFill xmlns:a="http://schemas.openxmlformats.org/drawingml/2006/main"/>
+          <a:ln xmlns:a="http://schemas.openxmlformats.org/drawingml/2006/main" w="0">
+            <a:noFill/>
+          </a:ln>
+        </p:spPr>
+        <p:txBody>
+          <a:bodyPr xmlns:a="http://schemas.openxmlformats.org/drawingml/2006/main" anchor="ctr">
+            <a:normAutofit fontScale="100000"/>
+          </a:bodyPr>
+          <a:lstStyle xmlns:a="http://schemas.openxmlformats.org/drawingml/2006/main"/>
+          <a:p xmlns:a="http://schemas.openxmlformats.org/drawingml/2006/main">
+            <a:pPr algn="ctr">
+              <a:defRPr sz="1125" b="1">
                 <a:solidFill>
                   <a:srgbClr val="2F785D"/>
                 </a:solidFill>
                 <a:latin typeface="Arial"/>
                 <a:ea typeface="Arial"/>
                 <a:cs typeface="Arial"/>
+              </a:defRPr>
+            </a:pPr>
+            <a:r>
+              <a:rPr sz="1125" b="1">
+                <a:solidFill>
+                  <a:srgbClr val="2F785D"/>
+                </a:solidFill>
+                <a:latin typeface="Arial"/>
+                <a:ea typeface="Arial"/>
+                <a:cs typeface="Arial"/>
               </a:rPr>
-              <a:t>Check the result: Compare the new forms and justify the conclusion.</a:t>
+              <a:t>5</a:t>
+            </a:r>
+          </a:p>
+        </p:txBody>
+      </p:sp>
+      <p:sp>
+        <p:nvSpPr>
+          <p:cNvPr id="25" name="">
+            <a:extLst xmlns:a="http://schemas.openxmlformats.org/drawingml/2006/main">
+              <a:ext uri="{FF2B5EF4-FFF2-40B4-BE49-F238E27FC236}">
+                <a16:creationId xmlns:a16="http://schemas.microsoft.com/office/drawing/2014/main" id="{83003F62-1206-4919-A9A4-29E72FCB65BC}"/>
+              </a:ext>
+            </a:extLst>
+          </p:cNvPr>
+          <p:cNvSpPr>
+            <a:spLocks xmlns:a="http://schemas.openxmlformats.org/drawingml/2006/main" noGrp="1"/>
+          </p:cNvSpPr>
+          <p:nvPr/>
+        </p:nvSpPr>
+        <p:spPr>
+          <a:xfrm xmlns:a="http://schemas.openxmlformats.org/drawingml/2006/main">
+            <a:off x="1714500" y="4933950"/>
+            <a:ext cx="9525000" cy="638175"/>
+          </a:xfrm>
+          <a:prstGeom xmlns:a="http://schemas.openxmlformats.org/drawingml/2006/main" prst="rect">
+            <a:avLst/>
+          </a:prstGeom>
+          <a:noFill xmlns:a="http://schemas.openxmlformats.org/drawingml/2006/main"/>
+          <a:ln xmlns:a="http://schemas.openxmlformats.org/drawingml/2006/main" w="0">
+            <a:noFill/>
+          </a:ln>
+        </p:spPr>
+        <p:txBody>
+          <a:bodyPr xmlns:a="http://schemas.openxmlformats.org/drawingml/2006/main" anchor="ctr">
+            <a:normAutofit fontScale="100000"/>
+          </a:bodyPr>
+          <a:lstStyle xmlns:a="http://schemas.openxmlformats.org/drawingml/2006/main"/>
+          <a:p xmlns:a="http://schemas.openxmlformats.org/drawingml/2006/main">
+            <a:pPr algn="l">
+              <a:defRPr sz="1575" b="1">
+                <a:solidFill>
+                  <a:srgbClr val="2F785D"/>
+                </a:solidFill>
+                <a:latin typeface="Arial"/>
+                <a:ea typeface="Arial"/>
+                <a:cs typeface="Arial"/>
+              </a:defRPr>
+            </a:pPr>
+            <a:r>
+              <a:rPr sz="1575" b="1">
+                <a:solidFill>
+                  <a:srgbClr val="2F785D"/>
+                </a:solidFill>
+                <a:latin typeface="Arial"/>
+                <a:ea typeface="Arial"/>
+                <a:cs typeface="Arial"/>
+              </a:rPr>
+              <a:t>75/120 = 5/8</a:t>
             </a:r>
           </a:p>
         </p:txBody>
@@ -8841,7 +8995,7 @@
     </p:spTree>
     <p:extLst>
       <p:ext uri="{BB962C8B-B14F-4D97-AF65-F5344CB8AC3E}">
-        <p14:creationId xmlns:p14="http://schemas.microsoft.com/office/powerpoint/2010/main" val="606516229"/>
+        <p14:creationId xmlns:p14="http://schemas.microsoft.com/office/powerpoint/2010/main" val="143185299"/>
       </p:ext>
     </p:extLst>
   </p:cSld>
@@ -9078,6 +9232,51 @@
                       </p:childTnLst>
                     </p:cTn>
                   </p:par>
+                  <p:par>
+                    <p:cTn id="23" fill="hold">
+                      <p:stCondLst>
+                        <p:cond delay="indefinite"/>
+                      </p:stCondLst>
+                      <p:childTnLst>
+                        <p:par>
+                          <p:cTn id="24" fill="hold">
+                            <p:stCondLst>
+                              <p:cond delay="0"/>
+                            </p:stCondLst>
+                            <p:childTnLst>
+                              <p:par>
+                                <p:cTn id="25" presetID="1" presetClass="entr" presetSubtype="0" fill="hold" grpId="0" nodeType="clickEffect">
+                                  <p:stCondLst>
+                                    <p:cond delay="0"/>
+                                  </p:stCondLst>
+                                  <p:childTnLst>
+                                    <p:set>
+                                      <p:cBhvr>
+                                        <p:cTn id="26" dur="1" fill="hold">
+                                          <p:stCondLst>
+                                            <p:cond delay="0"/>
+                                          </p:stCondLst>
+                                        </p:cTn>
+                                        <p:tgtEl>
+                                          <p:spTgt spid="25"/>
+                                        </p:tgtEl>
+                                        <p:attrNameLst>
+                                          <p:attrName>style.visibility</p:attrName>
+                                        </p:attrNameLst>
+                                      </p:cBhvr>
+                                      <p:to>
+                                        <p:strVal val="visible"/>
+                                      </p:to>
+                                    </p:set>
+                                  </p:childTnLst>
+                                </p:cTn>
+                              </p:par>
+                            </p:childTnLst>
+                          </p:cTn>
+                        </p:par>
+                      </p:childTnLst>
+                    </p:cTn>
+                  </p:par>
                 </p:childTnLst>
               </p:cTn>
               <p:prevCondLst>
@@ -9105,6 +9304,7 @@
       <p:bldP spid="16" grpId="0"/>
       <p:bldP spid="19" grpId="0"/>
       <p:bldP spid="22" grpId="0"/>
+      <p:bldP spid="25" grpId="0"/>
     </p:bldLst>
   </p:timing>
 </p:sld>
@@ -9134,7 +9334,7 @@
           <p:cNvPr id="15" name="">
             <a:extLst xmlns:a="http://schemas.openxmlformats.org/drawingml/2006/main">
               <a:ext uri="{FF2B5EF4-FFF2-40B4-BE49-F238E27FC236}">
-                <a16:creationId xmlns:a16="http://schemas.microsoft.com/office/drawing/2014/main" id="{C03B51DA-CF37-48FA-823C-49DB293A74FE}"/>
+                <a16:creationId xmlns:a16="http://schemas.microsoft.com/office/drawing/2014/main" id="{796F28BB-FB47-426A-AD75-1BCFFAE7ADF8}"/>
               </a:ext>
             </a:extLst>
           </p:cNvPr>
@@ -9166,7 +9366,7 @@
           <p:cNvPr id="2" name="">
             <a:extLst xmlns:a="http://schemas.openxmlformats.org/drawingml/2006/main">
               <a:ext uri="{FF2B5EF4-FFF2-40B4-BE49-F238E27FC236}">
-                <a16:creationId xmlns:a16="http://schemas.microsoft.com/office/drawing/2014/main" id="{35C4AF02-8C06-4AD4-8CD7-FA954E0042C5}"/>
+                <a16:creationId xmlns:a16="http://schemas.microsoft.com/office/drawing/2014/main" id="{04381648-1F37-4BCD-AB05-B81E29FC18E2}"/>
               </a:ext>
             </a:extLst>
           </p:cNvPr>
@@ -9223,7 +9423,7 @@
           <p:cNvPr id="3" name="">
             <a:extLst xmlns:a="http://schemas.openxmlformats.org/drawingml/2006/main">
               <a:ext uri="{FF2B5EF4-FFF2-40B4-BE49-F238E27FC236}">
-                <a16:creationId xmlns:a16="http://schemas.microsoft.com/office/drawing/2014/main" id="{C25BD0A1-72EF-4537-B136-BDF2F8BF4826}"/>
+                <a16:creationId xmlns:a16="http://schemas.microsoft.com/office/drawing/2014/main" id="{F75ACD6A-5883-4B42-8CE4-0C85F7955CE3}"/>
               </a:ext>
             </a:extLst>
           </p:cNvPr>
@@ -9255,7 +9455,7 @@
           <p:cNvPr id="4" name="">
             <a:extLst xmlns:a="http://schemas.openxmlformats.org/drawingml/2006/main">
               <a:ext uri="{FF2B5EF4-FFF2-40B4-BE49-F238E27FC236}">
-                <a16:creationId xmlns:a16="http://schemas.microsoft.com/office/drawing/2014/main" id="{F4849340-9A88-489A-846D-A62D9F742772}"/>
+                <a16:creationId xmlns:a16="http://schemas.microsoft.com/office/drawing/2014/main" id="{443E3269-4C83-48F7-A2A3-F019872EABDB}"/>
               </a:ext>
             </a:extLst>
           </p:cNvPr>
@@ -9312,7 +9512,7 @@
           <p:cNvPr id="5" name="">
             <a:extLst xmlns:a="http://schemas.openxmlformats.org/drawingml/2006/main">
               <a:ext uri="{FF2B5EF4-FFF2-40B4-BE49-F238E27FC236}">
-                <a16:creationId xmlns:a16="http://schemas.microsoft.com/office/drawing/2014/main" id="{E5EE905A-63FE-4B6E-8EF0-20A8B2ED832C}"/>
+                <a16:creationId xmlns:a16="http://schemas.microsoft.com/office/drawing/2014/main" id="{24C2B07A-3996-42BE-ABC8-AF218D5FF5B5}"/>
               </a:ext>
             </a:extLst>
           </p:cNvPr>
@@ -9369,7 +9569,7 @@
           <p:cNvPr id="6" name="">
             <a:extLst xmlns:a="http://schemas.openxmlformats.org/drawingml/2006/main">
               <a:ext uri="{FF2B5EF4-FFF2-40B4-BE49-F238E27FC236}">
-                <a16:creationId xmlns:a16="http://schemas.microsoft.com/office/drawing/2014/main" id="{17D8CD5F-B457-400E-8096-F2E02AC7E5D7}"/>
+                <a16:creationId xmlns:a16="http://schemas.microsoft.com/office/drawing/2014/main" id="{B8CC1A07-B14D-4494-8EDD-5B48E07FD40E}"/>
               </a:ext>
             </a:extLst>
           </p:cNvPr>
@@ -9426,7 +9626,7 @@
           <p:cNvPr id="7" name="">
             <a:extLst xmlns:a="http://schemas.openxmlformats.org/drawingml/2006/main">
               <a:ext uri="{FF2B5EF4-FFF2-40B4-BE49-F238E27FC236}">
-                <a16:creationId xmlns:a16="http://schemas.microsoft.com/office/drawing/2014/main" id="{59D8E926-BFC8-4ADA-A9FD-0B1C496F7994}"/>
+                <a16:creationId xmlns:a16="http://schemas.microsoft.com/office/drawing/2014/main" id="{EC0E5FE1-32C2-4F26-A0EE-084315765727}"/>
               </a:ext>
             </a:extLst>
           </p:cNvPr>
@@ -9458,7 +9658,7 @@
           <p:cNvPr id="8" name="">
             <a:extLst xmlns:a="http://schemas.openxmlformats.org/drawingml/2006/main">
               <a:ext uri="{FF2B5EF4-FFF2-40B4-BE49-F238E27FC236}">
-                <a16:creationId xmlns:a16="http://schemas.microsoft.com/office/drawing/2014/main" id="{96840B34-6645-4E35-9889-CAAF6C90EF30}"/>
+                <a16:creationId xmlns:a16="http://schemas.microsoft.com/office/drawing/2014/main" id="{C0AF4DBB-38D5-4834-A818-CB5203E3FB82}"/>
               </a:ext>
             </a:extLst>
           </p:cNvPr>
@@ -9515,7 +9715,7 @@
           <p:cNvPr id="9" name="">
             <a:extLst xmlns:a="http://schemas.openxmlformats.org/drawingml/2006/main">
               <a:ext uri="{FF2B5EF4-FFF2-40B4-BE49-F238E27FC236}">
-                <a16:creationId xmlns:a16="http://schemas.microsoft.com/office/drawing/2014/main" id="{3F554056-7BC9-4404-940B-95309C802B77}"/>
+                <a16:creationId xmlns:a16="http://schemas.microsoft.com/office/drawing/2014/main" id="{20B4D5AF-6269-4310-A34F-D0B2493CCBF7}"/>
               </a:ext>
             </a:extLst>
           </p:cNvPr>
@@ -9572,7 +9772,7 @@
           <p:cNvPr id="10" name="">
             <a:extLst xmlns:a="http://schemas.openxmlformats.org/drawingml/2006/main">
               <a:ext uri="{FF2B5EF4-FFF2-40B4-BE49-F238E27FC236}">
-                <a16:creationId xmlns:a16="http://schemas.microsoft.com/office/drawing/2014/main" id="{570597F3-A507-40ED-9ADC-109A4D255B85}"/>
+                <a16:creationId xmlns:a16="http://schemas.microsoft.com/office/drawing/2014/main" id="{75A91926-CA99-40F8-90D4-C6D41A8CCD28}"/>
               </a:ext>
             </a:extLst>
           </p:cNvPr>
@@ -9629,7 +9829,7 @@
           <p:cNvPr id="11" name="">
             <a:extLst xmlns:a="http://schemas.openxmlformats.org/drawingml/2006/main">
               <a:ext uri="{FF2B5EF4-FFF2-40B4-BE49-F238E27FC236}">
-                <a16:creationId xmlns:a16="http://schemas.microsoft.com/office/drawing/2014/main" id="{07029861-15C9-499D-A466-C22F7CE71AB5}"/>
+                <a16:creationId xmlns:a16="http://schemas.microsoft.com/office/drawing/2014/main" id="{83FDADC3-3A49-4CB6-9221-A6B75DF93442}"/>
               </a:ext>
             </a:extLst>
           </p:cNvPr>
@@ -9686,7 +9886,7 @@
           <p:cNvPr id="12" name="">
             <a:extLst xmlns:a="http://schemas.openxmlformats.org/drawingml/2006/main">
               <a:ext uri="{FF2B5EF4-FFF2-40B4-BE49-F238E27FC236}">
-                <a16:creationId xmlns:a16="http://schemas.microsoft.com/office/drawing/2014/main" id="{F70DF671-64C2-4EE1-9194-2FB1CDF1983B}"/>
+                <a16:creationId xmlns:a16="http://schemas.microsoft.com/office/drawing/2014/main" id="{B565B843-0341-4678-98CF-F47E321D3299}"/>
               </a:ext>
             </a:extLst>
           </p:cNvPr>
@@ -9718,7 +9918,7 @@
           <p:cNvPr id="13" name="">
             <a:extLst xmlns:a="http://schemas.openxmlformats.org/drawingml/2006/main">
               <a:ext uri="{FF2B5EF4-FFF2-40B4-BE49-F238E27FC236}">
-                <a16:creationId xmlns:a16="http://schemas.microsoft.com/office/drawing/2014/main" id="{2468044B-4CA5-480E-ADFA-CF7A1F6AADE8}"/>
+                <a16:creationId xmlns:a16="http://schemas.microsoft.com/office/drawing/2014/main" id="{68C25272-0AF3-4B57-ACA4-6867246E01FF}"/>
               </a:ext>
             </a:extLst>
           </p:cNvPr>
@@ -9775,7 +9975,7 @@
           <p:cNvPr id="14" name="">
             <a:extLst xmlns:a="http://schemas.openxmlformats.org/drawingml/2006/main">
               <a:ext uri="{FF2B5EF4-FFF2-40B4-BE49-F238E27FC236}">
-                <a16:creationId xmlns:a16="http://schemas.microsoft.com/office/drawing/2014/main" id="{940BF9D6-8948-431E-9981-ED85C71D13E3}"/>
+                <a16:creationId xmlns:a16="http://schemas.microsoft.com/office/drawing/2014/main" id="{8347293A-A45B-4B44-AD5D-62CC3CBA6EF1}"/>
               </a:ext>
             </a:extLst>
           </p:cNvPr>
@@ -9830,7 +10030,7 @@
     </p:spTree>
     <p:extLst>
       <p:ext uri="{BB962C8B-B14F-4D97-AF65-F5344CB8AC3E}">
-        <p14:creationId xmlns:p14="http://schemas.microsoft.com/office/powerpoint/2010/main" val="645678902"/>
+        <p14:creationId xmlns:p14="http://schemas.microsoft.com/office/powerpoint/2010/main" val="2049800437"/>
       </p:ext>
     </p:extLst>
   </p:cSld>
@@ -10031,7 +10231,7 @@
           <p:cNvPr id="16" name="">
             <a:extLst xmlns:a="http://schemas.openxmlformats.org/drawingml/2006/main">
               <a:ext uri="{FF2B5EF4-FFF2-40B4-BE49-F238E27FC236}">
-                <a16:creationId xmlns:a16="http://schemas.microsoft.com/office/drawing/2014/main" id="{B30B531D-EC4A-4488-B1B5-F1C83957004E}"/>
+                <a16:creationId xmlns:a16="http://schemas.microsoft.com/office/drawing/2014/main" id="{FCDCB53E-EFEE-4816-9D6A-9B7F466CE1CE}"/>
               </a:ext>
             </a:extLst>
           </p:cNvPr>
@@ -10063,7 +10263,7 @@
           <p:cNvPr id="2" name="">
             <a:extLst xmlns:a="http://schemas.openxmlformats.org/drawingml/2006/main">
               <a:ext uri="{FF2B5EF4-FFF2-40B4-BE49-F238E27FC236}">
-                <a16:creationId xmlns:a16="http://schemas.microsoft.com/office/drawing/2014/main" id="{1FB8F0C4-FB8C-400F-9717-179D63F86AAA}"/>
+                <a16:creationId xmlns:a16="http://schemas.microsoft.com/office/drawing/2014/main" id="{327598D5-181E-4E42-90CE-FAC484F6931E}"/>
               </a:ext>
             </a:extLst>
           </p:cNvPr>
@@ -10120,7 +10320,7 @@
           <p:cNvPr id="3" name="">
             <a:extLst xmlns:a="http://schemas.openxmlformats.org/drawingml/2006/main">
               <a:ext uri="{FF2B5EF4-FFF2-40B4-BE49-F238E27FC236}">
-                <a16:creationId xmlns:a16="http://schemas.microsoft.com/office/drawing/2014/main" id="{58D9C52C-BE9E-47B9-9FF6-1833B98B05B7}"/>
+                <a16:creationId xmlns:a16="http://schemas.microsoft.com/office/drawing/2014/main" id="{59DB2AB7-E720-45D2-9636-C1401D54D76E}"/>
               </a:ext>
             </a:extLst>
           </p:cNvPr>
@@ -10152,7 +10352,7 @@
           <p:cNvPr id="4" name="">
             <a:extLst xmlns:a="http://schemas.openxmlformats.org/drawingml/2006/main">
               <a:ext uri="{FF2B5EF4-FFF2-40B4-BE49-F238E27FC236}">
-                <a16:creationId xmlns:a16="http://schemas.microsoft.com/office/drawing/2014/main" id="{144B523B-1A7E-478E-8E3E-12C2A94BFB3A}"/>
+                <a16:creationId xmlns:a16="http://schemas.microsoft.com/office/drawing/2014/main" id="{59049D27-E33D-4E5B-93E2-DB4EF726E5CB}"/>
               </a:ext>
             </a:extLst>
           </p:cNvPr>
@@ -10209,7 +10409,7 @@
           <p:cNvPr id="5" name="">
             <a:extLst xmlns:a="http://schemas.openxmlformats.org/drawingml/2006/main">
               <a:ext uri="{FF2B5EF4-FFF2-40B4-BE49-F238E27FC236}">
-                <a16:creationId xmlns:a16="http://schemas.microsoft.com/office/drawing/2014/main" id="{C809C762-9507-4979-937C-C28F02E04A88}"/>
+                <a16:creationId xmlns:a16="http://schemas.microsoft.com/office/drawing/2014/main" id="{464D31C9-61B6-45D3-909F-D5413487DBDE}"/>
               </a:ext>
             </a:extLst>
           </p:cNvPr>
@@ -10266,7 +10466,7 @@
           <p:cNvPr id="6" name="">
             <a:extLst xmlns:a="http://schemas.openxmlformats.org/drawingml/2006/main">
               <a:ext uri="{FF2B5EF4-FFF2-40B4-BE49-F238E27FC236}">
-                <a16:creationId xmlns:a16="http://schemas.microsoft.com/office/drawing/2014/main" id="{1B91C1AC-35A5-4C39-873F-3821B59ADFF6}"/>
+                <a16:creationId xmlns:a16="http://schemas.microsoft.com/office/drawing/2014/main" id="{64677161-98D6-4D26-B078-00E201594AA0}"/>
               </a:ext>
             </a:extLst>
           </p:cNvPr>
@@ -10323,7 +10523,7 @@
           <p:cNvPr id="7" name="">
             <a:extLst xmlns:a="http://schemas.openxmlformats.org/drawingml/2006/main">
               <a:ext uri="{FF2B5EF4-FFF2-40B4-BE49-F238E27FC236}">
-                <a16:creationId xmlns:a16="http://schemas.microsoft.com/office/drawing/2014/main" id="{6C7D6D0F-E1C2-47E6-9ECE-2161C16505DE}"/>
+                <a16:creationId xmlns:a16="http://schemas.microsoft.com/office/drawing/2014/main" id="{1D1CECAA-6107-491E-B61E-08501F359615}"/>
               </a:ext>
             </a:extLst>
           </p:cNvPr>
@@ -10355,7 +10555,7 @@
           <p:cNvPr id="8" name="">
             <a:extLst xmlns:a="http://schemas.openxmlformats.org/drawingml/2006/main">
               <a:ext uri="{FF2B5EF4-FFF2-40B4-BE49-F238E27FC236}">
-                <a16:creationId xmlns:a16="http://schemas.microsoft.com/office/drawing/2014/main" id="{49521D5D-774D-4009-9B25-4A4826FBC6B5}"/>
+                <a16:creationId xmlns:a16="http://schemas.microsoft.com/office/drawing/2014/main" id="{72051923-8DAB-4C76-BB61-A7ED72E2848E}"/>
               </a:ext>
             </a:extLst>
           </p:cNvPr>
@@ -10412,7 +10612,7 @@
           <p:cNvPr id="9" name="">
             <a:extLst xmlns:a="http://schemas.openxmlformats.org/drawingml/2006/main">
               <a:ext uri="{FF2B5EF4-FFF2-40B4-BE49-F238E27FC236}">
-                <a16:creationId xmlns:a16="http://schemas.microsoft.com/office/drawing/2014/main" id="{3D5FAB36-41B9-4E3E-B6E7-D88EB578CC54}"/>
+                <a16:creationId xmlns:a16="http://schemas.microsoft.com/office/drawing/2014/main" id="{20554E78-9E0F-4B4D-B308-4D9D25DDACDF}"/>
               </a:ext>
             </a:extLst>
           </p:cNvPr>
@@ -10469,7 +10669,7 @@
           <p:cNvPr id="10" name="">
             <a:extLst xmlns:a="http://schemas.openxmlformats.org/drawingml/2006/main">
               <a:ext uri="{FF2B5EF4-FFF2-40B4-BE49-F238E27FC236}">
-                <a16:creationId xmlns:a16="http://schemas.microsoft.com/office/drawing/2014/main" id="{3D100217-C533-4D22-875A-083B1D5DF092}"/>
+                <a16:creationId xmlns:a16="http://schemas.microsoft.com/office/drawing/2014/main" id="{8EE0FBE1-9249-42F3-A6A4-CF8C4DC1D730}"/>
               </a:ext>
             </a:extLst>
           </p:cNvPr>
@@ -10526,7 +10726,7 @@
           <p:cNvPr id="11" name="">
             <a:extLst xmlns:a="http://schemas.openxmlformats.org/drawingml/2006/main">
               <a:ext uri="{FF2B5EF4-FFF2-40B4-BE49-F238E27FC236}">
-                <a16:creationId xmlns:a16="http://schemas.microsoft.com/office/drawing/2014/main" id="{DE595BAD-F91A-414C-B36C-9FFD0FC7A8B7}"/>
+                <a16:creationId xmlns:a16="http://schemas.microsoft.com/office/drawing/2014/main" id="{BF039FF3-4C7F-4523-84BB-05EB42F34427}"/>
               </a:ext>
             </a:extLst>
           </p:cNvPr>
@@ -10583,7 +10783,7 @@
           <p:cNvPr id="12" name="">
             <a:extLst xmlns:a="http://schemas.openxmlformats.org/drawingml/2006/main">
               <a:ext uri="{FF2B5EF4-FFF2-40B4-BE49-F238E27FC236}">
-                <a16:creationId xmlns:a16="http://schemas.microsoft.com/office/drawing/2014/main" id="{0DA0D4CD-E8B8-4AB8-92C7-E485DD3CF200}"/>
+                <a16:creationId xmlns:a16="http://schemas.microsoft.com/office/drawing/2014/main" id="{71557964-2231-43C2-AF53-ADF1FDD104A0}"/>
               </a:ext>
             </a:extLst>
           </p:cNvPr>
@@ -10640,7 +10840,7 @@
           <p:cNvPr id="13" name="">
             <a:extLst xmlns:a="http://schemas.openxmlformats.org/drawingml/2006/main">
               <a:ext uri="{FF2B5EF4-FFF2-40B4-BE49-F238E27FC236}">
-                <a16:creationId xmlns:a16="http://schemas.microsoft.com/office/drawing/2014/main" id="{76E1EEA3-0148-4FD6-9CD5-341DD947B91B}"/>
+                <a16:creationId xmlns:a16="http://schemas.microsoft.com/office/drawing/2014/main" id="{F1BD1A17-7A37-4E11-802C-8ECACA72E3C7}"/>
               </a:ext>
             </a:extLst>
           </p:cNvPr>
@@ -10697,7 +10897,7 @@
           <p:cNvPr id="14" name="">
             <a:extLst xmlns:a="http://schemas.openxmlformats.org/drawingml/2006/main">
               <a:ext uri="{FF2B5EF4-FFF2-40B4-BE49-F238E27FC236}">
-                <a16:creationId xmlns:a16="http://schemas.microsoft.com/office/drawing/2014/main" id="{A48FE092-C8BF-4095-9AAE-C057CE0A389C}"/>
+                <a16:creationId xmlns:a16="http://schemas.microsoft.com/office/drawing/2014/main" id="{00874F42-649A-4302-A87A-8F1647AA6693}"/>
               </a:ext>
             </a:extLst>
           </p:cNvPr>
@@ -10754,7 +10954,7 @@
           <p:cNvPr id="15" name="">
             <a:extLst xmlns:a="http://schemas.openxmlformats.org/drawingml/2006/main">
               <a:ext uri="{FF2B5EF4-FFF2-40B4-BE49-F238E27FC236}">
-                <a16:creationId xmlns:a16="http://schemas.microsoft.com/office/drawing/2014/main" id="{26716460-DB34-4A21-ABBE-884D87436CAD}"/>
+                <a16:creationId xmlns:a16="http://schemas.microsoft.com/office/drawing/2014/main" id="{9940C743-CF93-4805-B5FD-BD22B3B73887}"/>
               </a:ext>
             </a:extLst>
           </p:cNvPr>
@@ -10809,7 +11009,7 @@
     </p:spTree>
     <p:extLst>
       <p:ext uri="{BB962C8B-B14F-4D97-AF65-F5344CB8AC3E}">
-        <p14:creationId xmlns:p14="http://schemas.microsoft.com/office/powerpoint/2010/main" val="1907637222"/>
+        <p14:creationId xmlns:p14="http://schemas.microsoft.com/office/powerpoint/2010/main" val="299655878"/>
       </p:ext>
     </p:extLst>
   </p:cSld>
@@ -10964,7 +11164,7 @@
           <p:cNvPr id="16" name="">
             <a:extLst xmlns:a="http://schemas.openxmlformats.org/drawingml/2006/main">
               <a:ext uri="{FF2B5EF4-FFF2-40B4-BE49-F238E27FC236}">
-                <a16:creationId xmlns:a16="http://schemas.microsoft.com/office/drawing/2014/main" id="{F2F0EF7C-EF31-4310-88C1-7D8D3FBCCFE1}"/>
+                <a16:creationId xmlns:a16="http://schemas.microsoft.com/office/drawing/2014/main" id="{E9957CB1-2CCF-4E21-B11E-39D23CF1C78B}"/>
               </a:ext>
             </a:extLst>
           </p:cNvPr>
@@ -10996,7 +11196,7 @@
           <p:cNvPr id="2" name="">
             <a:extLst xmlns:a="http://schemas.openxmlformats.org/drawingml/2006/main">
               <a:ext uri="{FF2B5EF4-FFF2-40B4-BE49-F238E27FC236}">
-                <a16:creationId xmlns:a16="http://schemas.microsoft.com/office/drawing/2014/main" id="{74DA254E-141D-41D6-82DF-DCBC3B199404}"/>
+                <a16:creationId xmlns:a16="http://schemas.microsoft.com/office/drawing/2014/main" id="{16E70CDE-60A2-48AA-A5D8-628CD496E38C}"/>
               </a:ext>
             </a:extLst>
           </p:cNvPr>
@@ -11053,7 +11253,7 @@
           <p:cNvPr id="3" name="">
             <a:extLst xmlns:a="http://schemas.openxmlformats.org/drawingml/2006/main">
               <a:ext uri="{FF2B5EF4-FFF2-40B4-BE49-F238E27FC236}">
-                <a16:creationId xmlns:a16="http://schemas.microsoft.com/office/drawing/2014/main" id="{54F0E415-3AD1-4CC0-98C8-72F030700D7A}"/>
+                <a16:creationId xmlns:a16="http://schemas.microsoft.com/office/drawing/2014/main" id="{9447B134-6678-4500-B73A-F6C9095FF24A}"/>
               </a:ext>
             </a:extLst>
           </p:cNvPr>
@@ -11085,7 +11285,7 @@
           <p:cNvPr id="4" name="">
             <a:extLst xmlns:a="http://schemas.openxmlformats.org/drawingml/2006/main">
               <a:ext uri="{FF2B5EF4-FFF2-40B4-BE49-F238E27FC236}">
-                <a16:creationId xmlns:a16="http://schemas.microsoft.com/office/drawing/2014/main" id="{880634D1-5771-4C61-8BE9-06D8179D5BE5}"/>
+                <a16:creationId xmlns:a16="http://schemas.microsoft.com/office/drawing/2014/main" id="{42F88FBB-3ED3-42EC-AE1A-4BD62C9240C1}"/>
               </a:ext>
             </a:extLst>
           </p:cNvPr>
@@ -11142,7 +11342,7 @@
           <p:cNvPr id="5" name="">
             <a:extLst xmlns:a="http://schemas.openxmlformats.org/drawingml/2006/main">
               <a:ext uri="{FF2B5EF4-FFF2-40B4-BE49-F238E27FC236}">
-                <a16:creationId xmlns:a16="http://schemas.microsoft.com/office/drawing/2014/main" id="{602C14B6-99C1-4EFB-A941-9489CA5E26B7}"/>
+                <a16:creationId xmlns:a16="http://schemas.microsoft.com/office/drawing/2014/main" id="{C30382B6-4AC8-49EA-A5EF-78E9AAB1A0F5}"/>
               </a:ext>
             </a:extLst>
           </p:cNvPr>
@@ -11199,7 +11399,7 @@
           <p:cNvPr id="6" name="">
             <a:extLst xmlns:a="http://schemas.openxmlformats.org/drawingml/2006/main">
               <a:ext uri="{FF2B5EF4-FFF2-40B4-BE49-F238E27FC236}">
-                <a16:creationId xmlns:a16="http://schemas.microsoft.com/office/drawing/2014/main" id="{B249F555-CD1F-447C-8F4A-E1BB86FE4712}"/>
+                <a16:creationId xmlns:a16="http://schemas.microsoft.com/office/drawing/2014/main" id="{36AF0823-9F25-4156-A718-D83D6753C494}"/>
               </a:ext>
             </a:extLst>
           </p:cNvPr>
@@ -11256,7 +11456,7 @@
           <p:cNvPr id="7" name="">
             <a:extLst xmlns:a="http://schemas.openxmlformats.org/drawingml/2006/main">
               <a:ext uri="{FF2B5EF4-FFF2-40B4-BE49-F238E27FC236}">
-                <a16:creationId xmlns:a16="http://schemas.microsoft.com/office/drawing/2014/main" id="{12AEB9D2-0C96-43C7-84ED-A24E37020C62}"/>
+                <a16:creationId xmlns:a16="http://schemas.microsoft.com/office/drawing/2014/main" id="{7AE747EE-3712-4325-8FE2-3C71F3401840}"/>
               </a:ext>
             </a:extLst>
           </p:cNvPr>
@@ -11288,7 +11488,7 @@
           <p:cNvPr id="8" name="">
             <a:extLst xmlns:a="http://schemas.openxmlformats.org/drawingml/2006/main">
               <a:ext uri="{FF2B5EF4-FFF2-40B4-BE49-F238E27FC236}">
-                <a16:creationId xmlns:a16="http://schemas.microsoft.com/office/drawing/2014/main" id="{FF85ED1F-11FB-4D09-8E6E-F71AEC605223}"/>
+                <a16:creationId xmlns:a16="http://schemas.microsoft.com/office/drawing/2014/main" id="{61D0BD54-0238-4A59-8F95-FFF7BE2C68BB}"/>
               </a:ext>
             </a:extLst>
           </p:cNvPr>
@@ -11345,7 +11545,7 @@
           <p:cNvPr id="9" name="">
             <a:extLst xmlns:a="http://schemas.openxmlformats.org/drawingml/2006/main">
               <a:ext uri="{FF2B5EF4-FFF2-40B4-BE49-F238E27FC236}">
-                <a16:creationId xmlns:a16="http://schemas.microsoft.com/office/drawing/2014/main" id="{72849A68-13AB-47DE-A05D-A4D0A4E5AD77}"/>
+                <a16:creationId xmlns:a16="http://schemas.microsoft.com/office/drawing/2014/main" id="{C21F70BE-CB2C-41FD-B044-8976557DB87D}"/>
               </a:ext>
             </a:extLst>
           </p:cNvPr>
@@ -11406,7 +11606,7 @@
           <p:nvPr/>
         </p:nvPicPr>
         <p:blipFill>
-          <a:blip xmlns:r="http://schemas.openxmlformats.org/officeDocument/2006/relationships" xmlns:a="http://schemas.openxmlformats.org/drawingml/2006/main" r:embed="R0fac3e12aa6f413b"/>
+          <a:blip xmlns:r="http://schemas.openxmlformats.org/officeDocument/2006/relationships" xmlns:a="http://schemas.openxmlformats.org/drawingml/2006/main" r:embed="R417a610ac6ed44f9"/>
           <a:stretch xmlns:a="http://schemas.openxmlformats.org/drawingml/2006/main"/>
         </p:blipFill>
         <p:spPr>
@@ -11424,7 +11624,7 @@
           <p:cNvPr id="11" name="">
             <a:extLst xmlns:a="http://schemas.openxmlformats.org/drawingml/2006/main">
               <a:ext uri="{FF2B5EF4-FFF2-40B4-BE49-F238E27FC236}">
-                <a16:creationId xmlns:a16="http://schemas.microsoft.com/office/drawing/2014/main" id="{123BC655-D4CA-4D98-809B-8ABC3DF3259B}"/>
+                <a16:creationId xmlns:a16="http://schemas.microsoft.com/office/drawing/2014/main" id="{5481BF13-E1BB-4662-9AA5-EE9FC4E856EC}"/>
               </a:ext>
             </a:extLst>
           </p:cNvPr>
@@ -11481,7 +11681,7 @@
           <p:cNvPr id="12" name="">
             <a:extLst xmlns:a="http://schemas.openxmlformats.org/drawingml/2006/main">
               <a:ext uri="{FF2B5EF4-FFF2-40B4-BE49-F238E27FC236}">
-                <a16:creationId xmlns:a16="http://schemas.microsoft.com/office/drawing/2014/main" id="{BB0EC7DA-996C-469F-91C6-F37E0DFDA3C7}"/>
+                <a16:creationId xmlns:a16="http://schemas.microsoft.com/office/drawing/2014/main" id="{E9C4CFEF-F9F2-4D60-98C9-72CC7B7E435A}"/>
               </a:ext>
             </a:extLst>
           </p:cNvPr>
@@ -11538,7 +11738,7 @@
           <p:cNvPr id="13" name="">
             <a:extLst xmlns:a="http://schemas.openxmlformats.org/drawingml/2006/main">
               <a:ext uri="{FF2B5EF4-FFF2-40B4-BE49-F238E27FC236}">
-                <a16:creationId xmlns:a16="http://schemas.microsoft.com/office/drawing/2014/main" id="{ACD94023-6F36-4BBB-B003-D15F509F2565}"/>
+                <a16:creationId xmlns:a16="http://schemas.microsoft.com/office/drawing/2014/main" id="{AEBEA3C4-105F-425F-A17B-66F8E861BA74}"/>
               </a:ext>
             </a:extLst>
           </p:cNvPr>
@@ -11570,7 +11770,7 @@
           <p:cNvPr id="14" name="">
             <a:extLst xmlns:a="http://schemas.openxmlformats.org/drawingml/2006/main">
               <a:ext uri="{FF2B5EF4-FFF2-40B4-BE49-F238E27FC236}">
-                <a16:creationId xmlns:a16="http://schemas.microsoft.com/office/drawing/2014/main" id="{DA55086E-C0D6-4907-B74E-30A8469D14B5}"/>
+                <a16:creationId xmlns:a16="http://schemas.microsoft.com/office/drawing/2014/main" id="{5A22CFED-475B-4041-8325-27024EA1FAB0}"/>
               </a:ext>
             </a:extLst>
           </p:cNvPr>
@@ -11627,7 +11827,7 @@
           <p:cNvPr id="15" name="">
             <a:extLst xmlns:a="http://schemas.openxmlformats.org/drawingml/2006/main">
               <a:ext uri="{FF2B5EF4-FFF2-40B4-BE49-F238E27FC236}">
-                <a16:creationId xmlns:a16="http://schemas.microsoft.com/office/drawing/2014/main" id="{93F09994-C4B5-4420-AD42-7857BF216FD9}"/>
+                <a16:creationId xmlns:a16="http://schemas.microsoft.com/office/drawing/2014/main" id="{9FF9949B-93DD-45A6-A307-5F1B81B9CF4A}"/>
               </a:ext>
             </a:extLst>
           </p:cNvPr>
@@ -11682,7 +11882,7 @@
     </p:spTree>
     <p:extLst>
       <p:ext uri="{BB962C8B-B14F-4D97-AF65-F5344CB8AC3E}">
-        <p14:creationId xmlns:p14="http://schemas.microsoft.com/office/powerpoint/2010/main" val="1364200716"/>
+        <p14:creationId xmlns:p14="http://schemas.microsoft.com/office/powerpoint/2010/main" val="1139871311"/>
       </p:ext>
     </p:extLst>
   </p:cSld>
@@ -11837,7 +12037,7 @@
           <p:cNvPr id="23" name="">
             <a:extLst xmlns:a="http://schemas.openxmlformats.org/drawingml/2006/main">
               <a:ext uri="{FF2B5EF4-FFF2-40B4-BE49-F238E27FC236}">
-                <a16:creationId xmlns:a16="http://schemas.microsoft.com/office/drawing/2014/main" id="{80B8C2A4-B8DA-468F-90A4-B23793D3850F}"/>
+                <a16:creationId xmlns:a16="http://schemas.microsoft.com/office/drawing/2014/main" id="{14FA10C7-EEB9-4802-AE38-7552AB0C1A7B}"/>
               </a:ext>
             </a:extLst>
           </p:cNvPr>
@@ -11869,7 +12069,7 @@
           <p:cNvPr id="2" name="">
             <a:extLst xmlns:a="http://schemas.openxmlformats.org/drawingml/2006/main">
               <a:ext uri="{FF2B5EF4-FFF2-40B4-BE49-F238E27FC236}">
-                <a16:creationId xmlns:a16="http://schemas.microsoft.com/office/drawing/2014/main" id="{9F1B32AF-0AA4-4F13-8606-08CA86404D17}"/>
+                <a16:creationId xmlns:a16="http://schemas.microsoft.com/office/drawing/2014/main" id="{40C4EFB9-9C01-460E-BC9E-19525C0A30A0}"/>
               </a:ext>
             </a:extLst>
           </p:cNvPr>
@@ -11926,7 +12126,7 @@
           <p:cNvPr id="3" name="">
             <a:extLst xmlns:a="http://schemas.openxmlformats.org/drawingml/2006/main">
               <a:ext uri="{FF2B5EF4-FFF2-40B4-BE49-F238E27FC236}">
-                <a16:creationId xmlns:a16="http://schemas.microsoft.com/office/drawing/2014/main" id="{C96B8028-1563-44F8-AC09-7E583872D8C8}"/>
+                <a16:creationId xmlns:a16="http://schemas.microsoft.com/office/drawing/2014/main" id="{6DD871DC-5F93-4A98-BAC7-F085D68CF2C2}"/>
               </a:ext>
             </a:extLst>
           </p:cNvPr>
@@ -11958,7 +12158,7 @@
           <p:cNvPr id="4" name="">
             <a:extLst xmlns:a="http://schemas.openxmlformats.org/drawingml/2006/main">
               <a:ext uri="{FF2B5EF4-FFF2-40B4-BE49-F238E27FC236}">
-                <a16:creationId xmlns:a16="http://schemas.microsoft.com/office/drawing/2014/main" id="{C382EC1D-FA90-4919-95C7-0714F0396098}"/>
+                <a16:creationId xmlns:a16="http://schemas.microsoft.com/office/drawing/2014/main" id="{7A38B7DA-4532-41DD-BBB5-8481E6EEDCF1}"/>
               </a:ext>
             </a:extLst>
           </p:cNvPr>
@@ -12015,7 +12215,7 @@
           <p:cNvPr id="5" name="">
             <a:extLst xmlns:a="http://schemas.openxmlformats.org/drawingml/2006/main">
               <a:ext uri="{FF2B5EF4-FFF2-40B4-BE49-F238E27FC236}">
-                <a16:creationId xmlns:a16="http://schemas.microsoft.com/office/drawing/2014/main" id="{73F6266D-6C08-41F6-A0BB-CE48A47998E0}"/>
+                <a16:creationId xmlns:a16="http://schemas.microsoft.com/office/drawing/2014/main" id="{F6D0AFEF-2242-4FD0-A7BD-B39EB04EEE05}"/>
               </a:ext>
             </a:extLst>
           </p:cNvPr>
@@ -12072,7 +12272,7 @@
           <p:cNvPr id="6" name="">
             <a:extLst xmlns:a="http://schemas.openxmlformats.org/drawingml/2006/main">
               <a:ext uri="{FF2B5EF4-FFF2-40B4-BE49-F238E27FC236}">
-                <a16:creationId xmlns:a16="http://schemas.microsoft.com/office/drawing/2014/main" id="{CAAEA14C-E153-463A-83D6-4FD2DE5ABEFC}"/>
+                <a16:creationId xmlns:a16="http://schemas.microsoft.com/office/drawing/2014/main" id="{5B551FCB-8632-45F6-AF9E-92429063B06B}"/>
               </a:ext>
             </a:extLst>
           </p:cNvPr>
@@ -12129,7 +12329,7 @@
           <p:cNvPr id="7" name="">
             <a:extLst xmlns:a="http://schemas.openxmlformats.org/drawingml/2006/main">
               <a:ext uri="{FF2B5EF4-FFF2-40B4-BE49-F238E27FC236}">
-                <a16:creationId xmlns:a16="http://schemas.microsoft.com/office/drawing/2014/main" id="{E88056ED-55DF-4D0D-BB6A-C2ECF5330C4D}"/>
+                <a16:creationId xmlns:a16="http://schemas.microsoft.com/office/drawing/2014/main" id="{AD9C3BEA-14C8-4591-83B8-9CC930E038F4}"/>
               </a:ext>
             </a:extLst>
           </p:cNvPr>
@@ -12161,7 +12361,7 @@
           <p:cNvPr id="8" name="">
             <a:extLst xmlns:a="http://schemas.openxmlformats.org/drawingml/2006/main">
               <a:ext uri="{FF2B5EF4-FFF2-40B4-BE49-F238E27FC236}">
-                <a16:creationId xmlns:a16="http://schemas.microsoft.com/office/drawing/2014/main" id="{35DBFBDB-675B-4E9F-848D-EAD297CBCAAC}"/>
+                <a16:creationId xmlns:a16="http://schemas.microsoft.com/office/drawing/2014/main" id="{B82A3A2A-4F8B-4F96-A3CD-556FF565D8B1}"/>
               </a:ext>
             </a:extLst>
           </p:cNvPr>
@@ -12218,7 +12418,7 @@
           <p:cNvPr id="9" name="">
             <a:extLst xmlns:a="http://schemas.openxmlformats.org/drawingml/2006/main">
               <a:ext uri="{FF2B5EF4-FFF2-40B4-BE49-F238E27FC236}">
-                <a16:creationId xmlns:a16="http://schemas.microsoft.com/office/drawing/2014/main" id="{492ECB88-73B3-45C5-A737-D5DDAE0EA121}"/>
+                <a16:creationId xmlns:a16="http://schemas.microsoft.com/office/drawing/2014/main" id="{8BCDD050-D62D-487D-940A-B1C2EBA7D5FE}"/>
               </a:ext>
             </a:extLst>
           </p:cNvPr>
@@ -12275,7 +12475,7 @@
           <p:cNvPr id="10" name="">
             <a:extLst xmlns:a="http://schemas.openxmlformats.org/drawingml/2006/main">
               <a:ext uri="{FF2B5EF4-FFF2-40B4-BE49-F238E27FC236}">
-                <a16:creationId xmlns:a16="http://schemas.microsoft.com/office/drawing/2014/main" id="{93F5EA87-00BD-4A75-9640-AE4093ED5FFC}"/>
+                <a16:creationId xmlns:a16="http://schemas.microsoft.com/office/drawing/2014/main" id="{3636C755-C9F2-447A-8A2A-B0B673683DB3}"/>
               </a:ext>
             </a:extLst>
           </p:cNvPr>
@@ -12309,7 +12509,7 @@
           <p:cNvPr id="11" name="">
             <a:extLst xmlns:a="http://schemas.openxmlformats.org/drawingml/2006/main">
               <a:ext uri="{FF2B5EF4-FFF2-40B4-BE49-F238E27FC236}">
-                <a16:creationId xmlns:a16="http://schemas.microsoft.com/office/drawing/2014/main" id="{0F88667F-78BD-46D8-BA3D-9638EC36E361}"/>
+                <a16:creationId xmlns:a16="http://schemas.microsoft.com/office/drawing/2014/main" id="{5D7B0998-893C-4C78-8289-8353FB4AA266}"/>
               </a:ext>
             </a:extLst>
           </p:cNvPr>
@@ -12341,7 +12541,7 @@
           <p:cNvPr id="12" name="">
             <a:extLst xmlns:a="http://schemas.openxmlformats.org/drawingml/2006/main">
               <a:ext uri="{FF2B5EF4-FFF2-40B4-BE49-F238E27FC236}">
-                <a16:creationId xmlns:a16="http://schemas.microsoft.com/office/drawing/2014/main" id="{21284F89-2B80-49BB-8435-73227E85CB72}"/>
+                <a16:creationId xmlns:a16="http://schemas.microsoft.com/office/drawing/2014/main" id="{97E2E4C7-FB88-4E98-AD92-39571F353297}"/>
               </a:ext>
             </a:extLst>
           </p:cNvPr>
@@ -12398,7 +12598,7 @@
           <p:cNvPr id="13" name="">
             <a:extLst xmlns:a="http://schemas.openxmlformats.org/drawingml/2006/main">
               <a:ext uri="{FF2B5EF4-FFF2-40B4-BE49-F238E27FC236}">
-                <a16:creationId xmlns:a16="http://schemas.microsoft.com/office/drawing/2014/main" id="{C18662D9-6F58-4EA3-BAB7-C0C5312402B6}"/>
+                <a16:creationId xmlns:a16="http://schemas.microsoft.com/office/drawing/2014/main" id="{C70E64F5-3A46-4D4A-87A3-F14B9C377AC8}"/>
               </a:ext>
             </a:extLst>
           </p:cNvPr>
@@ -12455,7 +12655,7 @@
           <p:cNvPr id="14" name="">
             <a:extLst xmlns:a="http://schemas.openxmlformats.org/drawingml/2006/main">
               <a:ext uri="{FF2B5EF4-FFF2-40B4-BE49-F238E27FC236}">
-                <a16:creationId xmlns:a16="http://schemas.microsoft.com/office/drawing/2014/main" id="{719E0FAA-219F-4D4A-944E-1447212E83C6}"/>
+                <a16:creationId xmlns:a16="http://schemas.microsoft.com/office/drawing/2014/main" id="{CA8C5C9A-5C50-45DD-91AA-8CCCD22C8DD0}"/>
               </a:ext>
             </a:extLst>
           </p:cNvPr>
@@ -12489,7 +12689,7 @@
           <p:cNvPr id="15" name="">
             <a:extLst xmlns:a="http://schemas.openxmlformats.org/drawingml/2006/main">
               <a:ext uri="{FF2B5EF4-FFF2-40B4-BE49-F238E27FC236}">
-                <a16:creationId xmlns:a16="http://schemas.microsoft.com/office/drawing/2014/main" id="{C776C0B5-8B43-48E9-85B0-313DEB856DF8}"/>
+                <a16:creationId xmlns:a16="http://schemas.microsoft.com/office/drawing/2014/main" id="{ADECE813-3B50-4211-B842-6CE21F6B5BA4}"/>
               </a:ext>
             </a:extLst>
           </p:cNvPr>
@@ -12521,7 +12721,7 @@
           <p:cNvPr id="16" name="">
             <a:extLst xmlns:a="http://schemas.openxmlformats.org/drawingml/2006/main">
               <a:ext uri="{FF2B5EF4-FFF2-40B4-BE49-F238E27FC236}">
-                <a16:creationId xmlns:a16="http://schemas.microsoft.com/office/drawing/2014/main" id="{F18C2716-5459-4D60-9F24-41FD21804C01}"/>
+                <a16:creationId xmlns:a16="http://schemas.microsoft.com/office/drawing/2014/main" id="{8F143A53-2C6A-45D9-B64B-81A521A4A9B4}"/>
               </a:ext>
             </a:extLst>
           </p:cNvPr>
@@ -12578,7 +12778,7 @@
           <p:cNvPr id="17" name="">
             <a:extLst xmlns:a="http://schemas.openxmlformats.org/drawingml/2006/main">
               <a:ext uri="{FF2B5EF4-FFF2-40B4-BE49-F238E27FC236}">
-                <a16:creationId xmlns:a16="http://schemas.microsoft.com/office/drawing/2014/main" id="{2265A5A0-799D-4579-B2DD-965CC1FBFFA7}"/>
+                <a16:creationId xmlns:a16="http://schemas.microsoft.com/office/drawing/2014/main" id="{72D8E0E4-4CCB-4E21-AA1E-BC6F24113512}"/>
               </a:ext>
             </a:extLst>
           </p:cNvPr>
@@ -12635,7 +12835,7 @@
           <p:cNvPr id="18" name="">
             <a:extLst xmlns:a="http://schemas.openxmlformats.org/drawingml/2006/main">
               <a:ext uri="{FF2B5EF4-FFF2-40B4-BE49-F238E27FC236}">
-                <a16:creationId xmlns:a16="http://schemas.microsoft.com/office/drawing/2014/main" id="{07AAA39C-D852-4DB7-9697-12C572D49B3A}"/>
+                <a16:creationId xmlns:a16="http://schemas.microsoft.com/office/drawing/2014/main" id="{464EA147-217F-4AD8-9098-0F973D1CE3B7}"/>
               </a:ext>
             </a:extLst>
           </p:cNvPr>
@@ -12669,7 +12869,7 @@
           <p:cNvPr id="19" name="">
             <a:extLst xmlns:a="http://schemas.openxmlformats.org/drawingml/2006/main">
               <a:ext uri="{FF2B5EF4-FFF2-40B4-BE49-F238E27FC236}">
-                <a16:creationId xmlns:a16="http://schemas.microsoft.com/office/drawing/2014/main" id="{501B23F1-B461-46BE-AF05-40102FDB5BCA}"/>
+                <a16:creationId xmlns:a16="http://schemas.microsoft.com/office/drawing/2014/main" id="{28EF91F9-9D7D-4C76-96E2-59F66611276E}"/>
               </a:ext>
             </a:extLst>
           </p:cNvPr>
@@ -12701,7 +12901,7 @@
           <p:cNvPr id="20" name="">
             <a:extLst xmlns:a="http://schemas.openxmlformats.org/drawingml/2006/main">
               <a:ext uri="{FF2B5EF4-FFF2-40B4-BE49-F238E27FC236}">
-                <a16:creationId xmlns:a16="http://schemas.microsoft.com/office/drawing/2014/main" id="{19511C0C-39BF-4355-A3F9-B30EBCE91B5D}"/>
+                <a16:creationId xmlns:a16="http://schemas.microsoft.com/office/drawing/2014/main" id="{5F8D8D0D-CF70-4150-AA1C-0BE50C1BCB2E}"/>
               </a:ext>
             </a:extLst>
           </p:cNvPr>
@@ -12758,7 +12958,7 @@
           <p:cNvPr id="21" name="">
             <a:extLst xmlns:a="http://schemas.openxmlformats.org/drawingml/2006/main">
               <a:ext uri="{FF2B5EF4-FFF2-40B4-BE49-F238E27FC236}">
-                <a16:creationId xmlns:a16="http://schemas.microsoft.com/office/drawing/2014/main" id="{E348F52C-D837-49E4-9915-BF081B9F61C9}"/>
+                <a16:creationId xmlns:a16="http://schemas.microsoft.com/office/drawing/2014/main" id="{5FBAF93C-FC10-4BFF-872D-E758344B5D26}"/>
               </a:ext>
             </a:extLst>
           </p:cNvPr>
@@ -12815,7 +13015,7 @@
           <p:cNvPr id="22" name="">
             <a:extLst xmlns:a="http://schemas.openxmlformats.org/drawingml/2006/main">
               <a:ext uri="{FF2B5EF4-FFF2-40B4-BE49-F238E27FC236}">
-                <a16:creationId xmlns:a16="http://schemas.microsoft.com/office/drawing/2014/main" id="{43EC5995-706D-46DD-8A79-B55FF1A29460}"/>
+                <a16:creationId xmlns:a16="http://schemas.microsoft.com/office/drawing/2014/main" id="{A8628958-8AD2-44CD-81EB-603B477087F8}"/>
               </a:ext>
             </a:extLst>
           </p:cNvPr>
@@ -12870,7 +13070,7 @@
     </p:spTree>
     <p:extLst>
       <p:ext uri="{BB962C8B-B14F-4D97-AF65-F5344CB8AC3E}">
-        <p14:creationId xmlns:p14="http://schemas.microsoft.com/office/powerpoint/2010/main" val="1227511763"/>
+        <p14:creationId xmlns:p14="http://schemas.microsoft.com/office/powerpoint/2010/main" val="1399895810"/>
       </p:ext>
     </p:extLst>
   </p:cSld>
@@ -13071,7 +13271,7 @@
           <p:cNvPr id="22" name="">
             <a:extLst xmlns:a="http://schemas.openxmlformats.org/drawingml/2006/main">
               <a:ext uri="{FF2B5EF4-FFF2-40B4-BE49-F238E27FC236}">
-                <a16:creationId xmlns:a16="http://schemas.microsoft.com/office/drawing/2014/main" id="{D117DE11-29E8-4FCA-83EB-ABEC8960B308}"/>
+                <a16:creationId xmlns:a16="http://schemas.microsoft.com/office/drawing/2014/main" id="{60B885AC-142F-4E38-AA4E-54360D497301}"/>
               </a:ext>
             </a:extLst>
           </p:cNvPr>
@@ -13103,7 +13303,7 @@
           <p:cNvPr id="2" name="">
             <a:extLst xmlns:a="http://schemas.openxmlformats.org/drawingml/2006/main">
               <a:ext uri="{FF2B5EF4-FFF2-40B4-BE49-F238E27FC236}">
-                <a16:creationId xmlns:a16="http://schemas.microsoft.com/office/drawing/2014/main" id="{1F9C6660-7A71-457E-97A6-C758124AB889}"/>
+                <a16:creationId xmlns:a16="http://schemas.microsoft.com/office/drawing/2014/main" id="{2DF13776-0AD2-4B60-9FBA-2A31FD7DCD4D}"/>
               </a:ext>
             </a:extLst>
           </p:cNvPr>
@@ -13160,7 +13360,7 @@
           <p:cNvPr id="3" name="">
             <a:extLst xmlns:a="http://schemas.openxmlformats.org/drawingml/2006/main">
               <a:ext uri="{FF2B5EF4-FFF2-40B4-BE49-F238E27FC236}">
-                <a16:creationId xmlns:a16="http://schemas.microsoft.com/office/drawing/2014/main" id="{98F74D82-0B7E-46EC-936D-F495EE1B3446}"/>
+                <a16:creationId xmlns:a16="http://schemas.microsoft.com/office/drawing/2014/main" id="{08D9BCC4-F7F5-47D2-A754-C1F4DA79F55A}"/>
               </a:ext>
             </a:extLst>
           </p:cNvPr>
@@ -13192,7 +13392,7 @@
           <p:cNvPr id="4" name="">
             <a:extLst xmlns:a="http://schemas.openxmlformats.org/drawingml/2006/main">
               <a:ext uri="{FF2B5EF4-FFF2-40B4-BE49-F238E27FC236}">
-                <a16:creationId xmlns:a16="http://schemas.microsoft.com/office/drawing/2014/main" id="{A3D91075-90F7-4619-88D1-F09774982CA6}"/>
+                <a16:creationId xmlns:a16="http://schemas.microsoft.com/office/drawing/2014/main" id="{17E3E6AD-0927-4B68-B528-D7BA0548BC1C}"/>
               </a:ext>
             </a:extLst>
           </p:cNvPr>
@@ -13249,7 +13449,7 @@
           <p:cNvPr id="5" name="">
             <a:extLst xmlns:a="http://schemas.openxmlformats.org/drawingml/2006/main">
               <a:ext uri="{FF2B5EF4-FFF2-40B4-BE49-F238E27FC236}">
-                <a16:creationId xmlns:a16="http://schemas.microsoft.com/office/drawing/2014/main" id="{4BE22AC7-D66E-4771-87F1-8804F807A25D}"/>
+                <a16:creationId xmlns:a16="http://schemas.microsoft.com/office/drawing/2014/main" id="{2ADB3020-18F3-4EC6-A5D5-514FA157409F}"/>
               </a:ext>
             </a:extLst>
           </p:cNvPr>
@@ -13306,7 +13506,7 @@
           <p:cNvPr id="6" name="">
             <a:extLst xmlns:a="http://schemas.openxmlformats.org/drawingml/2006/main">
               <a:ext uri="{FF2B5EF4-FFF2-40B4-BE49-F238E27FC236}">
-                <a16:creationId xmlns:a16="http://schemas.microsoft.com/office/drawing/2014/main" id="{A54894EA-7BEA-4F5A-A31C-C55D5F14B432}"/>
+                <a16:creationId xmlns:a16="http://schemas.microsoft.com/office/drawing/2014/main" id="{1E7EDB81-4B5A-4A70-A9AF-83F0D3D0CE4F}"/>
               </a:ext>
             </a:extLst>
           </p:cNvPr>
@@ -13363,7 +13563,7 @@
           <p:cNvPr id="7" name="">
             <a:extLst xmlns:a="http://schemas.openxmlformats.org/drawingml/2006/main">
               <a:ext uri="{FF2B5EF4-FFF2-40B4-BE49-F238E27FC236}">
-                <a16:creationId xmlns:a16="http://schemas.microsoft.com/office/drawing/2014/main" id="{F85E2D99-33BE-4C9F-8F39-47E57D44A6A1}"/>
+                <a16:creationId xmlns:a16="http://schemas.microsoft.com/office/drawing/2014/main" id="{55E8EC17-1B86-4925-99ED-D3E2255252B7}"/>
               </a:ext>
             </a:extLst>
           </p:cNvPr>
@@ -13395,7 +13595,7 @@
           <p:cNvPr id="8" name="">
             <a:extLst xmlns:a="http://schemas.openxmlformats.org/drawingml/2006/main">
               <a:ext uri="{FF2B5EF4-FFF2-40B4-BE49-F238E27FC236}">
-                <a16:creationId xmlns:a16="http://schemas.microsoft.com/office/drawing/2014/main" id="{C8A7EF2A-CB1A-453B-A786-E9E726D71B2E}"/>
+                <a16:creationId xmlns:a16="http://schemas.microsoft.com/office/drawing/2014/main" id="{E70C86C3-1E96-435C-9303-A0D800DB0921}"/>
               </a:ext>
             </a:extLst>
           </p:cNvPr>
@@ -13452,7 +13652,7 @@
           <p:cNvPr id="9" name="">
             <a:extLst xmlns:a="http://schemas.openxmlformats.org/drawingml/2006/main">
               <a:ext uri="{FF2B5EF4-FFF2-40B4-BE49-F238E27FC236}">
-                <a16:creationId xmlns:a16="http://schemas.microsoft.com/office/drawing/2014/main" id="{A18A9EA0-48A3-4316-8FFB-213EA92EDA28}"/>
+                <a16:creationId xmlns:a16="http://schemas.microsoft.com/office/drawing/2014/main" id="{F45E86F2-9256-47E3-BA06-0091D1FD8B9A}"/>
               </a:ext>
             </a:extLst>
           </p:cNvPr>
@@ -13509,7 +13709,7 @@
           <p:cNvPr id="10" name="">
             <a:extLst xmlns:a="http://schemas.openxmlformats.org/drawingml/2006/main">
               <a:ext uri="{FF2B5EF4-FFF2-40B4-BE49-F238E27FC236}">
-                <a16:creationId xmlns:a16="http://schemas.microsoft.com/office/drawing/2014/main" id="{DE09779A-6BB5-4F88-AE2F-4E8CCB32CAA8}"/>
+                <a16:creationId xmlns:a16="http://schemas.microsoft.com/office/drawing/2014/main" id="{4BC0D924-0891-476A-9916-E4F7819625A8}"/>
               </a:ext>
             </a:extLst>
           </p:cNvPr>
@@ -13543,7 +13743,7 @@
           <p:cNvPr id="11" name="">
             <a:extLst xmlns:a="http://schemas.openxmlformats.org/drawingml/2006/main">
               <a:ext uri="{FF2B5EF4-FFF2-40B4-BE49-F238E27FC236}">
-                <a16:creationId xmlns:a16="http://schemas.microsoft.com/office/drawing/2014/main" id="{ED0D023B-6B38-4049-895B-BC051683D92D}"/>
+                <a16:creationId xmlns:a16="http://schemas.microsoft.com/office/drawing/2014/main" id="{53F10E49-1FAF-4D23-903B-17A352752FE0}"/>
               </a:ext>
             </a:extLst>
           </p:cNvPr>
@@ -13575,7 +13775,7 @@
           <p:cNvPr id="12" name="">
             <a:extLst xmlns:a="http://schemas.openxmlformats.org/drawingml/2006/main">
               <a:ext uri="{FF2B5EF4-FFF2-40B4-BE49-F238E27FC236}">
-                <a16:creationId xmlns:a16="http://schemas.microsoft.com/office/drawing/2014/main" id="{36F6A750-5732-4D09-A801-8E8FE80CB7B5}"/>
+                <a16:creationId xmlns:a16="http://schemas.microsoft.com/office/drawing/2014/main" id="{60BAE12B-1427-4D45-82A8-7702CDD36EEF}"/>
               </a:ext>
             </a:extLst>
           </p:cNvPr>
@@ -13632,7 +13832,7 @@
           <p:cNvPr id="13" name="">
             <a:extLst xmlns:a="http://schemas.openxmlformats.org/drawingml/2006/main">
               <a:ext uri="{FF2B5EF4-FFF2-40B4-BE49-F238E27FC236}">
-                <a16:creationId xmlns:a16="http://schemas.microsoft.com/office/drawing/2014/main" id="{B74C0D3E-C644-4CF2-A702-F7E9AF373F36}"/>
+                <a16:creationId xmlns:a16="http://schemas.microsoft.com/office/drawing/2014/main" id="{A42D3C37-11B2-41AD-88BC-F6FF971124D6}"/>
               </a:ext>
             </a:extLst>
           </p:cNvPr>
@@ -13689,7 +13889,7 @@
           <p:cNvPr id="14" name="">
             <a:extLst xmlns:a="http://schemas.openxmlformats.org/drawingml/2006/main">
               <a:ext uri="{FF2B5EF4-FFF2-40B4-BE49-F238E27FC236}">
-                <a16:creationId xmlns:a16="http://schemas.microsoft.com/office/drawing/2014/main" id="{35B4A3DC-EC96-475A-91B8-47B82CD555AA}"/>
+                <a16:creationId xmlns:a16="http://schemas.microsoft.com/office/drawing/2014/main" id="{71F2DF39-A027-42D5-89DE-99D7671CC207}"/>
               </a:ext>
             </a:extLst>
           </p:cNvPr>
@@ -13723,7 +13923,7 @@
           <p:cNvPr id="15" name="">
             <a:extLst xmlns:a="http://schemas.openxmlformats.org/drawingml/2006/main">
               <a:ext uri="{FF2B5EF4-FFF2-40B4-BE49-F238E27FC236}">
-                <a16:creationId xmlns:a16="http://schemas.microsoft.com/office/drawing/2014/main" id="{4624CDB4-2F3C-4122-BFE5-48770BD7E63A}"/>
+                <a16:creationId xmlns:a16="http://schemas.microsoft.com/office/drawing/2014/main" id="{53532D16-5620-4E65-A9B2-8EF94B71B7F6}"/>
               </a:ext>
             </a:extLst>
           </p:cNvPr>
@@ -13755,7 +13955,7 @@
           <p:cNvPr id="16" name="">
             <a:extLst xmlns:a="http://schemas.openxmlformats.org/drawingml/2006/main">
               <a:ext uri="{FF2B5EF4-FFF2-40B4-BE49-F238E27FC236}">
-                <a16:creationId xmlns:a16="http://schemas.microsoft.com/office/drawing/2014/main" id="{29BF653A-C331-4C47-AA7E-C8DD8401D1E1}"/>
+                <a16:creationId xmlns:a16="http://schemas.microsoft.com/office/drawing/2014/main" id="{29052277-44E8-4CEF-B747-2395F87C92CE}"/>
               </a:ext>
             </a:extLst>
           </p:cNvPr>
@@ -13812,7 +14012,7 @@
           <p:cNvPr id="17" name="">
             <a:extLst xmlns:a="http://schemas.openxmlformats.org/drawingml/2006/main">
               <a:ext uri="{FF2B5EF4-FFF2-40B4-BE49-F238E27FC236}">
-                <a16:creationId xmlns:a16="http://schemas.microsoft.com/office/drawing/2014/main" id="{A41ED4C4-DD86-49D7-B789-13E2D7E9B6CE}"/>
+                <a16:creationId xmlns:a16="http://schemas.microsoft.com/office/drawing/2014/main" id="{C63E276B-E337-4478-AA99-F9C97FBF02F2}"/>
               </a:ext>
             </a:extLst>
           </p:cNvPr>
@@ -13869,7 +14069,7 @@
           <p:cNvPr id="18" name="">
             <a:extLst xmlns:a="http://schemas.openxmlformats.org/drawingml/2006/main">
               <a:ext uri="{FF2B5EF4-FFF2-40B4-BE49-F238E27FC236}">
-                <a16:creationId xmlns:a16="http://schemas.microsoft.com/office/drawing/2014/main" id="{23344B7E-DF7C-4FFC-A645-6E602C96D53A}"/>
+                <a16:creationId xmlns:a16="http://schemas.microsoft.com/office/drawing/2014/main" id="{75FD054F-0B43-409A-9267-9B898BF1E63B}"/>
               </a:ext>
             </a:extLst>
           </p:cNvPr>
@@ -13903,7 +14103,7 @@
           <p:cNvPr id="19" name="">
             <a:extLst xmlns:a="http://schemas.openxmlformats.org/drawingml/2006/main">
               <a:ext uri="{FF2B5EF4-FFF2-40B4-BE49-F238E27FC236}">
-                <a16:creationId xmlns:a16="http://schemas.microsoft.com/office/drawing/2014/main" id="{A90F9954-3DF8-497C-A025-63ACCCED6533}"/>
+                <a16:creationId xmlns:a16="http://schemas.microsoft.com/office/drawing/2014/main" id="{462BAB6A-9F54-4244-BCBE-2B78D130ADFB}"/>
               </a:ext>
             </a:extLst>
           </p:cNvPr>
@@ -13935,7 +14135,7 @@
           <p:cNvPr id="20" name="">
             <a:extLst xmlns:a="http://schemas.openxmlformats.org/drawingml/2006/main">
               <a:ext uri="{FF2B5EF4-FFF2-40B4-BE49-F238E27FC236}">
-                <a16:creationId xmlns:a16="http://schemas.microsoft.com/office/drawing/2014/main" id="{4B9B0DEA-BBCE-47E3-AC84-0665A7ACE9F0}"/>
+                <a16:creationId xmlns:a16="http://schemas.microsoft.com/office/drawing/2014/main" id="{EEB948AE-FEB4-4A2E-A585-5D5BD5F9EE92}"/>
               </a:ext>
             </a:extLst>
           </p:cNvPr>
@@ -13992,7 +14192,7 @@
           <p:cNvPr id="21" name="">
             <a:extLst xmlns:a="http://schemas.openxmlformats.org/drawingml/2006/main">
               <a:ext uri="{FF2B5EF4-FFF2-40B4-BE49-F238E27FC236}">
-                <a16:creationId xmlns:a16="http://schemas.microsoft.com/office/drawing/2014/main" id="{0BCE54CB-436E-4CB5-9913-567F00C4A8EA}"/>
+                <a16:creationId xmlns:a16="http://schemas.microsoft.com/office/drawing/2014/main" id="{10C35C60-D03C-4C65-A108-289A58D48406}"/>
               </a:ext>
             </a:extLst>
           </p:cNvPr>
@@ -14047,7 +14247,7 @@
     </p:spTree>
     <p:extLst>
       <p:ext uri="{BB962C8B-B14F-4D97-AF65-F5344CB8AC3E}">
-        <p14:creationId xmlns:p14="http://schemas.microsoft.com/office/powerpoint/2010/main" val="435383042"/>
+        <p14:creationId xmlns:p14="http://schemas.microsoft.com/office/powerpoint/2010/main" val="861500743"/>
       </p:ext>
     </p:extLst>
   </p:cSld>
